--- a/docs/Campus_Connect_ERP_Presentation.pptx
+++ b/docs/Campus_Connect_ERP_Presentation.pptx
@@ -3152,7 +3152,7 @@
             <a:avLst/>
           </a:prstGeom>
           <a:solidFill>
-            <a:srgbClr val="2563EB"/>
+            <a:srgbClr val="06B6D4"/>
           </a:solidFill>
           <a:ln>
             <a:noFill/>
@@ -3188,8 +3188,8 @@
         </p:nvSpPr>
         <p:spPr>
           <a:xfrm>
-            <a:off x="731520" y="731520"/>
-            <a:ext cx="6217920" cy="5303520"/>
+            <a:off x="731520" y="777240"/>
+            <a:ext cx="6035040" cy="5303520"/>
           </a:xfrm>
           <a:prstGeom prst="rect">
             <a:avLst/>
@@ -3206,63 +3206,15 @@
               <a:spcAft>
                 <a:spcPts val="400"/>
               </a:spcAft>
-              <a:defRPr sz="1100" b="1">
-                <a:solidFill>
-                  <a:srgbClr val="10B981"/>
+              <a:defRPr sz="1200" b="1">
+                <a:solidFill>
+                  <a:srgbClr val="06B6D4"/>
                 </a:solidFill>
                 <a:latin typeface="Segoe UI"/>
               </a:defRPr>
             </a:pPr>
             <a:r>
               <a:t>🏛️ SHARAD INSTITUTE OF TECHNOLOGY COLLEGE OF ENGINEERING</a:t>
-            </a:r>
-          </a:p>
-          <a:p>
-            <a:pPr>
-              <a:spcAft>
-                <a:spcPts val="2400"/>
-              </a:spcAft>
-              <a:defRPr sz="1100">
-                <a:solidFill>
-                  <a:srgbClr val="F1F5F9"/>
-                </a:solidFill>
-                <a:latin typeface="Segoe UI"/>
-              </a:defRPr>
-            </a:pPr>
-            <a:r>
-              <a:t>Department of Computer Science &amp; Engineering • Academic Year 2025–26</a:t>
-            </a:r>
-          </a:p>
-          <a:p>
-            <a:pPr>
-              <a:spcAft>
-                <a:spcPts val="600"/>
-              </a:spcAft>
-              <a:defRPr sz="3800" b="1">
-                <a:solidFill>
-                  <a:srgbClr val="FFFFFF"/>
-                </a:solidFill>
-                <a:latin typeface="Segoe UI"/>
-              </a:defRPr>
-            </a:pPr>
-            <a:r>
-              <a:t>Campus Connect ERP</a:t>
-            </a:r>
-          </a:p>
-          <a:p>
-            <a:pPr>
-              <a:spcAft>
-                <a:spcPts val="1800"/>
-              </a:spcAft>
-              <a:defRPr sz="1700" b="1">
-                <a:solidFill>
-                  <a:srgbClr val="2563EB"/>
-                </a:solidFill>
-                <a:latin typeface="Segoe UI"/>
-              </a:defRPr>
-            </a:pPr>
-            <a:r>
-              <a:t>Integrated College Management &amp; Academic Ledger System</a:t>
             </a:r>
           </a:p>
           <a:p>
@@ -3272,13 +3224,13 @@
               </a:spcAft>
               <a:defRPr sz="1200">
                 <a:solidFill>
-                  <a:srgbClr val="CBD5E1"/>
-                </a:solidFill>
-                <a:latin typeface="Segoe UI"/>
-              </a:defRPr>
-            </a:pPr>
-            <a:r>
-              <a:t>A production-grade, centralized enterprise portal orchestrating student attendance tracking, 4-tier continuous examination marks entry, automated grade card publication, coursework lifecycle, and role-governed campus administration.</a:t>
+                  <a:srgbClr val="94A3B8"/>
+                </a:solidFill>
+                <a:latin typeface="Segoe UI"/>
+              </a:defRPr>
+            </a:pPr>
+            <a:r>
+              <a:t>Department of Computer Science &amp; Engineering • Academic Year 2025–26</a:t>
             </a:r>
           </a:p>
           <a:p>
@@ -3286,60 +3238,47 @@
               <a:spcAft>
                 <a:spcPts val="600"/>
               </a:spcAft>
-              <a:defRPr sz="950" b="1">
-                <a:solidFill>
-                  <a:srgbClr val="94A3B8"/>
-                </a:solidFill>
-                <a:latin typeface="Segoe UI"/>
-              </a:defRPr>
-            </a:pPr>
-            <a:r>
-              <a:t>VERIFIED TECHNOLOGY STACK:</a:t>
+              <a:defRPr sz="3600" b="1">
+                <a:solidFill>
+                  <a:srgbClr val="FFFFFF"/>
+                </a:solidFill>
+                <a:latin typeface="Segoe UI"/>
+              </a:defRPr>
+            </a:pPr>
+            <a:r>
+              <a:t>Campus Connect ERP</a:t>
             </a:r>
           </a:p>
           <a:p>
             <a:pPr>
               <a:spcAft>
-                <a:spcPts val="2000"/>
+                <a:spcPts val="1800"/>
               </a:spcAft>
-              <a:defRPr sz="1050">
-                <a:solidFill>
-                  <a:srgbClr val="E2E8F0"/>
-                </a:solidFill>
-                <a:latin typeface="Segoe UI"/>
-              </a:defRPr>
-            </a:pPr>
-            <a:r>
-              <a:t>• Backend: Python 3.11 • Flask Web Framework • SQLAlchemy 2.0 ORM</a:t>
-            </a:r>
-            <a:br/>
-            <a:r>
-              <a:t>• Database: PostgreSQL Cloud DB • Connection Pooling • Alembic</a:t>
-            </a:r>
-            <a:br/>
-            <a:r>
-              <a:t>• Frontend: Responsive HTML5 • Vanilla CSS3 • Vanilla JavaScript ES6</a:t>
-            </a:r>
-            <a:br/>
-            <a:r>
-              <a:t>• Deployment: Render Cloud Web Service • Gunicorn • ProxyFix Security</a:t>
-            </a:r>
-          </a:p>
-          <a:p>
-            <a:pPr>
-              <a:defRPr sz="950">
-                <a:solidFill>
-                  <a:srgbClr val="94A3B8"/>
-                </a:solidFill>
-                <a:latin typeface="Segoe UI"/>
-              </a:defRPr>
-            </a:pPr>
-            <a:r>
-              <a:t>Project Repository: https://github.com/ayanmulani4867-cyber/Campus-mini2</a:t>
-            </a:r>
-            <a:br/>
-            <a:r>
-              <a:t>Developer Attribution: Ayan Mulani &amp; Engineering Team | SITCOE Yadrav</a:t>
+              <a:defRPr sz="2000" b="1">
+                <a:solidFill>
+                  <a:srgbClr val="06B6D4"/>
+                </a:solidFill>
+                <a:latin typeface="Segoe UI"/>
+              </a:defRPr>
+            </a:pPr>
+            <a:r>
+              <a:t>Integrated Campus Management System</a:t>
+            </a:r>
+          </a:p>
+          <a:p>
+            <a:pPr>
+              <a:spcAft>
+                <a:spcPts val="2400"/>
+              </a:spcAft>
+              <a:defRPr sz="1400">
+                <a:solidFill>
+                  <a:srgbClr val="CBD5E1"/>
+                </a:solidFill>
+                <a:latin typeface="Segoe UI"/>
+              </a:defRPr>
+            </a:pPr>
+            <a:r>
+              <a:t>A production-grade, centralized web application orchestrating roll-call attendance tracking, 4-tier continuous examination assessment, automated student grade card publication, and role-governed campus administration.</a:t>
             </a:r>
           </a:p>
         </p:txBody>
@@ -3352,8 +3291,87 @@
         </p:nvSpPr>
         <p:spPr>
           <a:xfrm>
-            <a:off x="7040880" y="914400"/>
-            <a:ext cx="4389120" cy="5120640"/>
+            <a:off x="731520" y="4297680"/>
+            <a:ext cx="5943600" cy="1691640"/>
+          </a:xfrm>
+          <a:prstGeom prst="rect">
+            <a:avLst/>
+          </a:prstGeom>
+          <a:solidFill>
+            <a:srgbClr val="1E293B"/>
+          </a:solidFill>
+          <a:ln w="12700">
+            <a:solidFill>
+              <a:srgbClr val="334155"/>
+            </a:solidFill>
+          </a:ln>
+        </p:spPr>
+        <p:style>
+          <a:lnRef idx="1">
+            <a:schemeClr val="accent1"/>
+          </a:lnRef>
+          <a:fillRef idx="3">
+            <a:schemeClr val="accent1"/>
+          </a:fillRef>
+          <a:effectRef idx="2">
+            <a:schemeClr val="accent1"/>
+          </a:effectRef>
+          <a:fontRef idx="minor">
+            <a:schemeClr val="lt1"/>
+          </a:fontRef>
+        </p:style>
+        <p:txBody>
+          <a:bodyPr rtlCol="0" anchor="ctr" wrap="square" lIns="182880" tIns="109728"/>
+          <a:lstStyle/>
+          <a:p>
+            <a:pPr algn="ctr">
+              <a:spcAft>
+                <a:spcPts val="400"/>
+              </a:spcAft>
+              <a:defRPr sz="1100" b="1">
+                <a:solidFill>
+                  <a:srgbClr val="06B6D4"/>
+                </a:solidFill>
+                <a:latin typeface="Segoe UI"/>
+              </a:defRPr>
+            </a:pPr>
+            <a:r>
+              <a:t>PROJECT DOMAIN: Web Applications • Academic ERP Architecture</a:t>
+            </a:r>
+          </a:p>
+          <a:p>
+            <a:pPr>
+              <a:defRPr sz="1100">
+                <a:solidFill>
+                  <a:srgbClr val="F1F5F9"/>
+                </a:solidFill>
+                <a:latin typeface="Segoe UI"/>
+              </a:defRPr>
+            </a:pPr>
+            <a:r>
+              <a:t>• Technology Stack: Python 3.11 • Flask Web Framework • PostgreSQL • SQLAlchemy 2.0 ORM</a:t>
+            </a:r>
+            <a:br/>
+            <a:r>
+              <a:t>• Developer Attribution: Ayan Mulani (Project Lead) &amp; Project Team</a:t>
+            </a:r>
+            <a:br/>
+            <a:r>
+              <a:t>• GitHub Codebase: https://github.com/ayanmulani4867-cyber/Campus-mini2</a:t>
+            </a:r>
+          </a:p>
+        </p:txBody>
+      </p:sp>
+      <p:sp>
+        <p:nvSpPr>
+          <p:cNvPr id="6" name="Rectangle 5"/>
+          <p:cNvSpPr/>
+          <p:nvPr/>
+        </p:nvSpPr>
+        <p:spPr>
+          <a:xfrm>
+            <a:off x="7040880" y="1005840"/>
+            <a:ext cx="4434840" cy="4983480"/>
           </a:xfrm>
           <a:prstGeom prst="rect">
             <a:avLst/>
@@ -3363,7 +3381,7 @@
           </a:solidFill>
           <a:ln w="19050">
             <a:solidFill>
-              <a:srgbClr val="334155"/>
+              <a:srgbClr val="0891B2"/>
             </a:solidFill>
           </a:ln>
         </p:spPr>
@@ -3391,14 +3409,14 @@
       </p:sp>
       <p:sp>
         <p:nvSpPr>
-          <p:cNvPr id="6" name="TextBox 5"/>
+          <p:cNvPr id="7" name="TextBox 6"/>
           <p:cNvSpPr txBox="1"/>
           <p:nvPr/>
         </p:nvSpPr>
         <p:spPr>
           <a:xfrm>
-            <a:off x="7132320" y="960120"/>
-            <a:ext cx="4206240" cy="365760"/>
+            <a:off x="7132320" y="1051560"/>
+            <a:ext cx="4251960" cy="365760"/>
           </a:xfrm>
           <a:prstGeom prst="rect">
             <a:avLst/>
@@ -3412,22 +3430,22 @@
           <a:lstStyle/>
           <a:p>
             <a:pPr>
-              <a:defRPr sz="900" b="1">
-                <a:solidFill>
-                  <a:srgbClr val="2563EB"/>
-                </a:solidFill>
-                <a:latin typeface="Segoe UI"/>
-              </a:defRPr>
-            </a:pPr>
-            <a:r>
-              <a:t>REAL RUNNING SYSTEM INTERFACE</a:t>
+              <a:defRPr sz="1100" b="1">
+                <a:solidFill>
+                  <a:srgbClr val="06B6D4"/>
+                </a:solidFill>
+                <a:latin typeface="Segoe UI"/>
+              </a:defRPr>
+            </a:pPr>
+            <a:r>
+              <a:t>AUTHENTIC LIVE SYSTEM DASHBOARD</a:t>
             </a:r>
           </a:p>
         </p:txBody>
       </p:sp>
       <p:pic>
         <p:nvPicPr>
-          <p:cNvPr id="7" name="Picture 6" descr="01_login_portal.png"/>
+          <p:cNvPr id="8" name="Picture 7" descr="02_admin_dashboard.png"/>
           <p:cNvPicPr>
             <a:picLocks noChangeAspect="1"/>
           </p:cNvPicPr>
@@ -3441,38 +3459,14 @@
         </p:blipFill>
         <p:spPr>
           <a:xfrm>
-            <a:off x="7178040" y="1280160"/>
-            <a:ext cx="4114800" cy="2571750"/>
+            <a:off x="7178040" y="1463040"/>
+            <a:ext cx="4160520" cy="2600325"/>
           </a:xfrm>
           <a:prstGeom prst="rect">
             <a:avLst/>
           </a:prstGeom>
         </p:spPr>
       </p:pic>
-      <p:pic>
-        <p:nvPicPr>
-          <p:cNvPr id="8" name="Picture 7" descr="02_admin_dashboard.png"/>
-          <p:cNvPicPr>
-            <a:picLocks noChangeAspect="1"/>
-          </p:cNvPicPr>
-          <p:nvPr/>
-        </p:nvPicPr>
-        <p:blipFill>
-          <a:blip r:embed="rId3"/>
-          <a:stretch>
-            <a:fillRect/>
-          </a:stretch>
-        </p:blipFill>
-        <p:spPr>
-          <a:xfrm>
-            <a:off x="7178040" y="3611880"/>
-            <a:ext cx="4114800" cy="2571750"/>
-          </a:xfrm>
-          <a:prstGeom prst="rect">
-            <a:avLst/>
-          </a:prstGeom>
-        </p:spPr>
-      </p:pic>
       <p:sp>
         <p:nvSpPr>
           <p:cNvPr id="9" name="TextBox 8"/>
@@ -3481,8 +3475,8 @@
         </p:nvSpPr>
         <p:spPr>
           <a:xfrm>
-            <a:off x="10058400" y="6309360"/>
-            <a:ext cx="1371600" cy="274320"/>
+            <a:off x="7178040" y="4434840"/>
+            <a:ext cx="4160520" cy="1463040"/>
           </a:xfrm>
           <a:prstGeom prst="rect">
             <a:avLst/>
@@ -3490,13 +3484,73 @@
           <a:noFill/>
         </p:spPr>
         <p:txBody>
+          <a:bodyPr wrap="square">
+            <a:spAutoFit/>
+          </a:bodyPr>
+          <a:lstStyle/>
+          <a:p>
+            <a:pPr>
+              <a:spcAft>
+                <a:spcPts val="300"/>
+              </a:spcAft>
+              <a:defRPr sz="1200" b="1">
+                <a:solidFill>
+                  <a:srgbClr val="FFFFFF"/>
+                </a:solidFill>
+                <a:latin typeface="Segoe UI"/>
+              </a:defRPr>
+            </a:pPr>
+            <a:r>
+              <a:t>Verified System Capabilities:</a:t>
+            </a:r>
+          </a:p>
+          <a:p>
+            <a:pPr>
+              <a:defRPr sz="1100">
+                <a:solidFill>
+                  <a:srgbClr val="06B6D4"/>
+                </a:solidFill>
+                <a:latin typeface="Segoe UI"/>
+              </a:defRPr>
+            </a:pPr>
+            <a:r>
+              <a:t>✔ Real-Time PostgreSQL Database Connection</a:t>
+            </a:r>
+            <a:br/>
+            <a:r>
+              <a:t>✔ 3 Roles: Administrator, Faculty, Student</a:t>
+            </a:r>
+            <a:br/>
+            <a:r>
+              <a:t>✔ Zero Mock Data: Authentic Academic Records</a:t>
+            </a:r>
+          </a:p>
+        </p:txBody>
+      </p:sp>
+      <p:sp>
+        <p:nvSpPr>
+          <p:cNvPr id="10" name="TextBox 9"/>
+          <p:cNvSpPr txBox="1"/>
+          <p:nvPr/>
+        </p:nvSpPr>
+        <p:spPr>
+          <a:xfrm>
+            <a:off x="10058400" y="6217920"/>
+            <a:ext cx="1371600" cy="320040"/>
+          </a:xfrm>
+          <a:prstGeom prst="rect">
+            <a:avLst/>
+          </a:prstGeom>
+          <a:noFill/>
+        </p:spPr>
+        <p:txBody>
           <a:bodyPr wrap="none">
             <a:spAutoFit/>
           </a:bodyPr>
           <a:lstStyle/>
           <a:p>
             <a:pPr algn="r">
-              <a:defRPr sz="1000" b="1">
+              <a:defRPr sz="1200" b="1">
                 <a:solidFill>
                   <a:srgbClr val="94A3B8"/>
                 </a:solidFill>
@@ -3578,7 +3632,7 @@
         <p:spPr>
           <a:xfrm>
             <a:off x="731520" y="365760"/>
-            <a:ext cx="10728655" cy="868680"/>
+            <a:ext cx="10728655" cy="1005840"/>
           </a:xfrm>
           <a:prstGeom prst="rect">
             <a:avLst/>
@@ -3611,20 +3665,20 @@
           <a:lstStyle/>
           <a:p>
             <a:pPr algn="ctr">
-              <a:defRPr sz="950" b="1">
-                <a:solidFill>
-                  <a:srgbClr val="2563EB"/>
-                </a:solidFill>
-                <a:latin typeface="Segoe UI"/>
-              </a:defRPr>
-            </a:pPr>
-            <a:r>
-              <a:t>PROJECT FOUNDATION</a:t>
-            </a:r>
-          </a:p>
-          <a:p>
-            <a:pPr>
-              <a:defRPr sz="1800" b="1">
+              <a:defRPr sz="1100" b="1">
+                <a:solidFill>
+                  <a:srgbClr val="0891B2"/>
+                </a:solidFill>
+                <a:latin typeface="Segoe UI"/>
+              </a:defRPr>
+            </a:pPr>
+            <a:r>
+              <a:t>PROJECT MOTIVATION &amp; SCOPE</a:t>
+            </a:r>
+          </a:p>
+          <a:p>
+            <a:pPr>
+              <a:defRPr sz="2800" b="1">
                 <a:solidFill>
                   <a:srgbClr val="0F172A"/>
                 </a:solidFill>
@@ -3632,7 +3686,7 @@
               </a:defRPr>
             </a:pPr>
             <a:r>
-              <a:t>Problem Statement &amp; Strategic Objectives</a:t>
+              <a:t>Problem Statement &amp; Measurable Objectives</a:t>
             </a:r>
           </a:p>
         </p:txBody>
@@ -3646,7 +3700,7 @@
         <p:spPr>
           <a:xfrm>
             <a:off x="9601200" y="502920"/>
-            <a:ext cx="1645920" cy="365760"/>
+            <a:ext cx="1645920" cy="411480"/>
           </a:xfrm>
           <a:prstGeom prst="rect">
             <a:avLst/>
@@ -3660,9 +3714,9 @@
           <a:lstStyle/>
           <a:p>
             <a:pPr algn="r">
-              <a:defRPr sz="1100" b="1">
-                <a:solidFill>
-                  <a:srgbClr val="64748B"/>
+              <a:defRPr sz="1300" b="1">
+                <a:solidFill>
+                  <a:srgbClr val="0284C7"/>
                 </a:solidFill>
                 <a:latin typeface="Segoe UI"/>
               </a:defRPr>
@@ -3681,8 +3735,8 @@
         </p:nvSpPr>
         <p:spPr>
           <a:xfrm>
-            <a:off x="731520" y="6492240"/>
-            <a:ext cx="10728655" cy="274320"/>
+            <a:off x="731520" y="6400800"/>
+            <a:ext cx="10728655" cy="320040"/>
           </a:xfrm>
           <a:prstGeom prst="rect">
             <a:avLst/>
@@ -3696,7 +3750,7 @@
           <a:lstStyle/>
           <a:p>
             <a:pPr>
-              <a:defRPr sz="900">
+              <a:defRPr sz="1050">
                 <a:solidFill>
                   <a:srgbClr val="64748B"/>
                 </a:solidFill>
@@ -3704,7 +3758,7 @@
               </a:defRPr>
             </a:pPr>
             <a:r>
-              <a:t>Campus Connect ERP • Sharad Institute of Technology College of Engineering, Yadrav (SITCOE) • Live PostgreSQL Production System</a:t>
+              <a:t>Campus Connect ERP • Sharad Institute of Technology College of Engineering (SITCOE) • Live PostgreSQL Production System</a:t>
             </a:r>
           </a:p>
         </p:txBody>
@@ -3717,8 +3771,8 @@
         </p:nvSpPr>
         <p:spPr>
           <a:xfrm>
-            <a:off x="731520" y="1417320"/>
-            <a:ext cx="5212080" cy="4892040"/>
+            <a:off x="731520" y="1508760"/>
+            <a:ext cx="5212080" cy="4709160"/>
           </a:xfrm>
           <a:prstGeom prst="rect">
             <a:avLst/>
@@ -3747,7 +3801,7 @@
           </a:fontRef>
         </p:style>
         <p:txBody>
-          <a:bodyPr rtlCol="0" anchor="ctr" wrap="square" lIns="274320" rIns="274320" tIns="228600"/>
+          <a:bodyPr rtlCol="0" anchor="ctr" wrap="square" lIns="274320" rIns="274320" tIns="201168"/>
           <a:lstStyle/>
           <a:p>
             <a:pPr algn="ctr">
@@ -3762,12 +3816,12 @@
               </a:defRPr>
             </a:pPr>
             <a:r>
-              <a:t>🚨 ACADEMIC PAIN POINTS &amp; CHALLENGES</a:t>
-            </a:r>
-          </a:p>
-          <a:p>
-            <a:pPr>
-              <a:defRPr sz="1100" b="1">
+              <a:t>🚨 OPERATIONAL CHALLENGES IN CAMPUS ADMINISTRATION</a:t>
+            </a:r>
+          </a:p>
+          <a:p>
+            <a:pPr>
+              <a:defRPr sz="1500" b="1">
                 <a:solidFill>
                   <a:srgbClr val="0F172A"/>
                 </a:solidFill>
@@ -3775,7 +3829,7 @@
               </a:defRPr>
             </a:pPr>
             <a:r>
-              <a:t>• Fragmented Academic Information</a:t>
+              <a:t>• Fragmented Academic Records</a:t>
             </a:r>
           </a:p>
           <a:p>
@@ -3783,20 +3837,20 @@
               <a:spcAft>
                 <a:spcPts val="1000"/>
               </a:spcAft>
-              <a:defRPr sz="1000">
-                <a:solidFill>
-                  <a:srgbClr val="64748B"/>
-                </a:solidFill>
-                <a:latin typeface="Segoe UI"/>
-              </a:defRPr>
-            </a:pPr>
-            <a:r>
-              <a:t>  Colleges traditionally store student records, enrollment lists, and course schedules across disparate offline registers and unlinked spreadsheets, leading to data synchronization bottlenecks.</a:t>
-            </a:r>
-          </a:p>
-          <a:p>
-            <a:pPr>
-              <a:defRPr sz="1100" b="1">
+              <a:defRPr sz="1200">
+                <a:solidFill>
+                  <a:srgbClr val="334155"/>
+                </a:solidFill>
+                <a:latin typeface="Segoe UI"/>
+              </a:defRPr>
+            </a:pPr>
+            <a:r>
+              <a:t>  Student profiles, course enrollments, and department lists reside in disconnected offline registers and spreadsheets, causing data inconsistency and synchronization bottlenecks.</a:t>
+            </a:r>
+          </a:p>
+          <a:p>
+            <a:pPr>
+              <a:defRPr sz="1500" b="1">
                 <a:solidFill>
                   <a:srgbClr val="0F172A"/>
                 </a:solidFill>
@@ -3804,7 +3858,7 @@
               </a:defRPr>
             </a:pPr>
             <a:r>
-              <a:t>• Inefficient Attendance &amp; Result Tracking</a:t>
+              <a:t>• Laborious Attendance Tracking</a:t>
             </a:r>
           </a:p>
           <a:p>
@@ -3812,20 +3866,20 @@
               <a:spcAft>
                 <a:spcPts val="1000"/>
               </a:spcAft>
-              <a:defRPr sz="1000">
-                <a:solidFill>
-                  <a:srgbClr val="64748B"/>
-                </a:solidFill>
-                <a:latin typeface="Segoe UI"/>
-              </a:defRPr>
-            </a:pPr>
-            <a:r>
-              <a:t>  Manual attendance logs make real-time roll-call auditing cumbersome. Continuous assessment (CA1, CA2, Mid-Sem, End-Sem) lacks automated total calculation, resulting in delayed grade finalization.</a:t>
-            </a:r>
-          </a:p>
-          <a:p>
-            <a:pPr>
-              <a:defRPr sz="1100" b="1">
+              <a:defRPr sz="1200">
+                <a:solidFill>
+                  <a:srgbClr val="334155"/>
+                </a:solidFill>
+                <a:latin typeface="Segoe UI"/>
+              </a:defRPr>
+            </a:pPr>
+            <a:r>
+              <a:t>  Manual classroom roll-calls require extensive paperwork, leading to delayed computation of attendance percentages and late identification of attendance shortages.</a:t>
+            </a:r>
+          </a:p>
+          <a:p>
+            <a:pPr>
+              <a:defRPr sz="1500" b="1">
                 <a:solidFill>
                   <a:srgbClr val="0F172A"/>
                 </a:solidFill>
@@ -3833,7 +3887,7 @@
               </a:defRPr>
             </a:pPr>
             <a:r>
-              <a:t>• Manual Notice &amp; Assignment Circulation</a:t>
+              <a:t>• Disjoint Examination Scoring</a:t>
             </a:r>
           </a:p>
           <a:p>
@@ -3841,20 +3895,20 @@
               <a:spcAft>
                 <a:spcPts val="1000"/>
               </a:spcAft>
-              <a:defRPr sz="1000">
-                <a:solidFill>
-                  <a:srgbClr val="64748B"/>
-                </a:solidFill>
-                <a:latin typeface="Segoe UI"/>
-              </a:defRPr>
-            </a:pPr>
-            <a:r>
-              <a:t>  Circulating physical circulars and collecting assignment submissions via email causes lost submissions, unverified deadlines, and absence of an auditable evaluation history.</a:t>
-            </a:r>
-          </a:p>
-          <a:p>
-            <a:pPr>
-              <a:defRPr sz="1100" b="1">
+              <a:defRPr sz="1200">
+                <a:solidFill>
+                  <a:srgbClr val="334155"/>
+                </a:solidFill>
+                <a:latin typeface="Segoe UI"/>
+              </a:defRPr>
+            </a:pPr>
+            <a:r>
+              <a:t>  Multi-tier assessments (CA1, CA2, Mid-Sem, End-Sem) lack centralized tabulation, resulting in manual calculation errors and delayed publication of official student grade cards.</a:t>
+            </a:r>
+          </a:p>
+          <a:p>
+            <a:pPr>
+              <a:defRPr sz="1500" b="1">
                 <a:solidFill>
                   <a:srgbClr val="0F172A"/>
                 </a:solidFill>
@@ -3862,7 +3916,7 @@
               </a:defRPr>
             </a:pPr>
             <a:r>
-              <a:t>• Lack of Role-Governed Workspace Isolation</a:t>
+              <a:t>• Absence of Role-Based Governance</a:t>
             </a:r>
           </a:p>
           <a:p>
@@ -3870,15 +3924,15 @@
               <a:spcAft>
                 <a:spcPts val="1000"/>
               </a:spcAft>
-              <a:defRPr sz="1000">
-                <a:solidFill>
-                  <a:srgbClr val="64748B"/>
-                </a:solidFill>
-                <a:latin typeface="Segoe UI"/>
-              </a:defRPr>
-            </a:pPr>
-            <a:r>
-              <a:t>  Absence of granular Role-Based Access Control (RBAC) creates security hazards where administrative privileges, faculty assessment sheets, and student result cards are not strictly compartmentalized.</a:t>
+              <a:defRPr sz="1200">
+                <a:solidFill>
+                  <a:srgbClr val="334155"/>
+                </a:solidFill>
+                <a:latin typeface="Segoe UI"/>
+              </a:defRPr>
+            </a:pPr>
+            <a:r>
+              <a:t>  Without strict Role-Based Access Control (RBAC), administrative privileges, faculty grading sheets, and student academic reports are not securely compartmentalized.</a:t>
             </a:r>
           </a:p>
         </p:txBody>
@@ -3891,8 +3945,8 @@
         </p:nvSpPr>
         <p:spPr>
           <a:xfrm>
-            <a:off x="6217920" y="1417320"/>
-            <a:ext cx="5212080" cy="4892040"/>
+            <a:off x="6217920" y="1508760"/>
+            <a:ext cx="5212080" cy="4709160"/>
           </a:xfrm>
           <a:prstGeom prst="rect">
             <a:avLst/>
@@ -3921,7 +3975,7 @@
           </a:fontRef>
         </p:style>
         <p:txBody>
-          <a:bodyPr rtlCol="0" anchor="ctr" wrap="square" lIns="274320" rIns="274320" tIns="228600"/>
+          <a:bodyPr rtlCol="0" anchor="ctr" wrap="square" lIns="274320" rIns="274320" tIns="201168"/>
           <a:lstStyle/>
           <a:p>
             <a:pPr algn="ctr">
@@ -3930,18 +3984,18 @@
               </a:spcAft>
               <a:defRPr sz="1300" b="1">
                 <a:solidFill>
-                  <a:srgbClr val="10B981"/>
-                </a:solidFill>
-                <a:latin typeface="Segoe UI"/>
-              </a:defRPr>
-            </a:pPr>
-            <a:r>
-              <a:t>🎯 CORE OBJECTIVES OF CAMPUS CONNECT ERP</a:t>
-            </a:r>
-          </a:p>
-          <a:p>
-            <a:pPr>
-              <a:defRPr sz="1100" b="1">
+                  <a:srgbClr val="0284C7"/>
+                </a:solidFill>
+                <a:latin typeface="Segoe UI"/>
+              </a:defRPr>
+            </a:pPr>
+            <a:r>
+              <a:t>🎯 CAMPUS CONNECT ERP OBJECTIVES &amp; SOLUTIONS</a:t>
+            </a:r>
+          </a:p>
+          <a:p>
+            <a:pPr>
+              <a:defRPr sz="1500" b="1">
                 <a:solidFill>
                   <a:srgbClr val="0F172A"/>
                 </a:solidFill>
@@ -3949,7 +4003,7 @@
               </a:defRPr>
             </a:pPr>
             <a:r>
-              <a:t>✔ Centralized Academic Master Database</a:t>
+              <a:t>✔ Centralized Relational Database</a:t>
             </a:r>
           </a:p>
           <a:p>
@@ -3957,20 +4011,20 @@
               <a:spcAft>
                 <a:spcPts val="1000"/>
               </a:spcAft>
-              <a:defRPr sz="1000">
-                <a:solidFill>
-                  <a:srgbClr val="64748B"/>
-                </a:solidFill>
-                <a:latin typeface="Segoe UI"/>
-              </a:defRPr>
-            </a:pPr>
-            <a:r>
-              <a:t>  Deploy a unified relational PostgreSQL schema managed via SQLAlchemy 2.0 ORM, integrating Students, Faculty, Courses, Departments, and Enrollments with zero demo/mock fallback.</a:t>
-            </a:r>
-          </a:p>
-          <a:p>
-            <a:pPr>
-              <a:defRPr sz="1100" b="1">
+              <a:defRPr sz="1200">
+                <a:solidFill>
+                  <a:srgbClr val="334155"/>
+                </a:solidFill>
+                <a:latin typeface="Segoe UI"/>
+              </a:defRPr>
+            </a:pPr>
+            <a:r>
+              <a:t>  Establish a unified PostgreSQL database via SQLAlchemy 2.0 ORM, integrating Students, Faculty, Courses, and Departments with zero reliance on placeholder demo data.</a:t>
+            </a:r>
+          </a:p>
+          <a:p>
+            <a:pPr>
+              <a:defRPr sz="1500" b="1">
                 <a:solidFill>
                   <a:srgbClr val="0F172A"/>
                 </a:solidFill>
@@ -3978,7 +4032,7 @@
               </a:defRPr>
             </a:pPr>
             <a:r>
-              <a:t>✔ Continuous 4-Tier Assessment &amp; Grade Generation</a:t>
+              <a:t>✔ Real-Time Attendance Ledger</a:t>
             </a:r>
           </a:p>
           <a:p>
@@ -3986,20 +4040,20 @@
               <a:spcAft>
                 <a:spcPts val="1000"/>
               </a:spcAft>
-              <a:defRPr sz="1000">
-                <a:solidFill>
-                  <a:srgbClr val="64748B"/>
-                </a:solidFill>
-                <a:latin typeface="Segoe UI"/>
-              </a:defRPr>
-            </a:pPr>
-            <a:r>
-              <a:t>  Provide faculty with dedicated grading sheets for CA1 (20), CA2 (20), Mid-Sem (30), and End-Sem (70), featuring approval workflows and instant SGPA/CGPA grade card generation.</a:t>
-            </a:r>
-          </a:p>
-          <a:p>
-            <a:pPr>
-              <a:defRPr sz="1100" b="1">
+              <a:defRPr sz="1200">
+                <a:solidFill>
+                  <a:srgbClr val="334155"/>
+                </a:solidFill>
+                <a:latin typeface="Segoe UI"/>
+              </a:defRPr>
+            </a:pPr>
+            <a:r>
+              <a:t>  Digitize classroom roll-call with live attendance score computation, subject-wise breakdown, and automatic flagging of students falling below the mandatory 75% board threshold.</a:t>
+            </a:r>
+          </a:p>
+          <a:p>
+            <a:pPr>
+              <a:defRPr sz="1500" b="1">
                 <a:solidFill>
                   <a:srgbClr val="0F172A"/>
                 </a:solidFill>
@@ -4007,7 +4061,7 @@
               </a:defRPr>
             </a:pPr>
             <a:r>
-              <a:t>✔ Live Attendance Ledger &amp; Eligibility Monitoring</a:t>
+              <a:t>✔ Unified 4-Tier Assessment Engine</a:t>
             </a:r>
           </a:p>
           <a:p>
@@ -4015,20 +4069,20 @@
               <a:spcAft>
                 <a:spcPts val="1000"/>
               </a:spcAft>
-              <a:defRPr sz="1000">
-                <a:solidFill>
-                  <a:srgbClr val="64748B"/>
-                </a:solidFill>
-                <a:latin typeface="Segoe UI"/>
-              </a:defRPr>
-            </a:pPr>
-            <a:r>
-              <a:t>  Digitize classroom roll-call with live attendance score computation, subject-wise breakdown, and automatic flagging of students falling below the mandatory 75% board threshold.</a:t>
-            </a:r>
-          </a:p>
-          <a:p>
-            <a:pPr>
-              <a:defRPr sz="1100" b="1">
+              <a:defRPr sz="1200">
+                <a:solidFill>
+                  <a:srgbClr val="334155"/>
+                </a:solidFill>
+                <a:latin typeface="Segoe UI"/>
+              </a:defRPr>
+            </a:pPr>
+            <a:r>
+              <a:t>  Equip faculty with structured grading sheets for CA1 (20), CA2 (20), Mid-Sem (30), and End-Sem (70), featuring review submission and automated SGPA/CGPA grade card generation.</a:t>
+            </a:r>
+          </a:p>
+          <a:p>
+            <a:pPr>
+              <a:defRPr sz="1500" b="1">
                 <a:solidFill>
                   <a:srgbClr val="0F172A"/>
                 </a:solidFill>
@@ -4036,7 +4090,7 @@
               </a:defRPr>
             </a:pPr>
             <a:r>
-              <a:t>✔ Multi-Tier Role-Based Access Control (RBAC)</a:t>
+              <a:t>✔ Strict Role-Based Access Control (RBAC)</a:t>
             </a:r>
           </a:p>
           <a:p>
@@ -4044,15 +4098,15 @@
               <a:spcAft>
                 <a:spcPts val="1000"/>
               </a:spcAft>
-              <a:defRPr sz="1000">
-                <a:solidFill>
-                  <a:srgbClr val="64748B"/>
-                </a:solidFill>
-                <a:latin typeface="Segoe UI"/>
-              </a:defRPr>
-            </a:pPr>
-            <a:r>
-              <a:t>  Enforce strict server-side session authentication with token isolation across Administrators, Faculty, and Students to guarantee data integrity and individual record privacy.</a:t>
+              <a:defRPr sz="1200">
+                <a:solidFill>
+                  <a:srgbClr val="334155"/>
+                </a:solidFill>
+                <a:latin typeface="Segoe UI"/>
+              </a:defRPr>
+            </a:pPr>
+            <a:r>
+              <a:t>  Enforce token-based session verification and server-side route guards across Administrators, Faculty, and Students to safeguard individual academic records and system security.</a:t>
             </a:r>
           </a:p>
         </p:txBody>
@@ -4127,7 +4181,7 @@
         <p:spPr>
           <a:xfrm>
             <a:off x="731520" y="365760"/>
-            <a:ext cx="10728655" cy="868680"/>
+            <a:ext cx="10728655" cy="1005840"/>
           </a:xfrm>
           <a:prstGeom prst="rect">
             <a:avLst/>
@@ -4160,20 +4214,20 @@
           <a:lstStyle/>
           <a:p>
             <a:pPr algn="ctr">
-              <a:defRPr sz="950" b="1">
-                <a:solidFill>
-                  <a:srgbClr val="2563EB"/>
-                </a:solidFill>
-                <a:latin typeface="Segoe UI"/>
-              </a:defRPr>
-            </a:pPr>
-            <a:r>
-              <a:t>TECHNICAL SPECIFICATION</a:t>
-            </a:r>
-          </a:p>
-          <a:p>
-            <a:pPr>
-              <a:defRPr sz="1800" b="1">
+              <a:defRPr sz="1100" b="1">
+                <a:solidFill>
+                  <a:srgbClr val="0891B2"/>
+                </a:solidFill>
+                <a:latin typeface="Segoe UI"/>
+              </a:defRPr>
+            </a:pPr>
+            <a:r>
+              <a:t>TECHNICAL SPECIFICATION &amp; FLOW</a:t>
+            </a:r>
+          </a:p>
+          <a:p>
+            <a:pPr>
+              <a:defRPr sz="2800" b="1">
                 <a:solidFill>
                   <a:srgbClr val="0F172A"/>
                 </a:solidFill>
@@ -4181,7 +4235,7 @@
               </a:defRPr>
             </a:pPr>
             <a:r>
-              <a:t>System Architecture &amp; Technology Stack</a:t>
+              <a:t>System Architecture &amp; Verified Technology Stack</a:t>
             </a:r>
           </a:p>
         </p:txBody>
@@ -4195,7 +4249,7 @@
         <p:spPr>
           <a:xfrm>
             <a:off x="9601200" y="502920"/>
-            <a:ext cx="1645920" cy="365760"/>
+            <a:ext cx="1645920" cy="411480"/>
           </a:xfrm>
           <a:prstGeom prst="rect">
             <a:avLst/>
@@ -4209,9 +4263,9 @@
           <a:lstStyle/>
           <a:p>
             <a:pPr algn="r">
-              <a:defRPr sz="1100" b="1">
-                <a:solidFill>
-                  <a:srgbClr val="64748B"/>
+              <a:defRPr sz="1300" b="1">
+                <a:solidFill>
+                  <a:srgbClr val="0284C7"/>
                 </a:solidFill>
                 <a:latin typeface="Segoe UI"/>
               </a:defRPr>
@@ -4230,8 +4284,8 @@
         </p:nvSpPr>
         <p:spPr>
           <a:xfrm>
-            <a:off x="731520" y="6492240"/>
-            <a:ext cx="10728655" cy="274320"/>
+            <a:off x="731520" y="6400800"/>
+            <a:ext cx="10728655" cy="320040"/>
           </a:xfrm>
           <a:prstGeom prst="rect">
             <a:avLst/>
@@ -4245,7 +4299,7 @@
           <a:lstStyle/>
           <a:p>
             <a:pPr>
-              <a:defRPr sz="900">
+              <a:defRPr sz="1050">
                 <a:solidFill>
                   <a:srgbClr val="64748B"/>
                 </a:solidFill>
@@ -4253,7 +4307,7 @@
               </a:defRPr>
             </a:pPr>
             <a:r>
-              <a:t>Campus Connect ERP • Sharad Institute of Technology College of Engineering, Yadrav (SITCOE) • Live PostgreSQL Production System</a:t>
+              <a:t>Campus Connect ERP • Sharad Institute of Technology College of Engineering (SITCOE) • Live PostgreSQL Production System</a:t>
             </a:r>
           </a:p>
         </p:txBody>
@@ -4266,8 +4320,341 @@
         </p:nvSpPr>
         <p:spPr>
           <a:xfrm>
-            <a:off x="731520" y="1417320"/>
-            <a:ext cx="2514600" cy="3657600"/>
+            <a:off x="731520" y="1508760"/>
+            <a:ext cx="3291840" cy="1508760"/>
+          </a:xfrm>
+          <a:prstGeom prst="rect">
+            <a:avLst/>
+          </a:prstGeom>
+          <a:solidFill>
+            <a:srgbClr val="FFFFFF"/>
+          </a:solidFill>
+          <a:ln w="19050">
+            <a:solidFill>
+              <a:srgbClr val="0284C7"/>
+            </a:solidFill>
+          </a:ln>
+        </p:spPr>
+        <p:style>
+          <a:lnRef idx="1">
+            <a:schemeClr val="accent1"/>
+          </a:lnRef>
+          <a:fillRef idx="3">
+            <a:schemeClr val="accent1"/>
+          </a:fillRef>
+          <a:effectRef idx="2">
+            <a:schemeClr val="accent1"/>
+          </a:effectRef>
+          <a:fontRef idx="minor">
+            <a:schemeClr val="lt1"/>
+          </a:fontRef>
+        </p:style>
+        <p:txBody>
+          <a:bodyPr rtlCol="0" anchor="ctr" wrap="square" lIns="164592" tIns="109728"/>
+          <a:lstStyle/>
+          <a:p>
+            <a:pPr algn="ctr">
+              <a:spcAft>
+                <a:spcPts val="300"/>
+              </a:spcAft>
+              <a:defRPr sz="1050" b="1">
+                <a:solidFill>
+                  <a:srgbClr val="0284C7"/>
+                </a:solidFill>
+                <a:latin typeface="Segoe UI"/>
+              </a:defRPr>
+            </a:pPr>
+            <a:r>
+              <a:t>01 • PRESENTATION TIER</a:t>
+            </a:r>
+          </a:p>
+          <a:p>
+            <a:pPr>
+              <a:spcAft>
+                <a:spcPts val="400"/>
+              </a:spcAft>
+              <a:defRPr sz="1500" b="1">
+                <a:solidFill>
+                  <a:srgbClr val="0F172A"/>
+                </a:solidFill>
+                <a:latin typeface="Segoe UI"/>
+              </a:defRPr>
+            </a:pPr>
+            <a:r>
+              <a:t>Client Browser Interface</a:t>
+            </a:r>
+          </a:p>
+          <a:p>
+            <a:pPr>
+              <a:defRPr sz="1100">
+                <a:solidFill>
+                  <a:srgbClr val="334155"/>
+                </a:solidFill>
+                <a:latin typeface="Segoe UI"/>
+              </a:defRPr>
+            </a:pPr>
+            <a:r>
+              <a:t>Responsive HTML5, Vanilla CSS3 (Custom Theme), Vanilla JavaScript (ES6 Fetch Client)</a:t>
+            </a:r>
+          </a:p>
+        </p:txBody>
+      </p:sp>
+      <p:sp>
+        <p:nvSpPr>
+          <p:cNvPr id="7" name="TextBox 6"/>
+          <p:cNvSpPr txBox="1"/>
+          <p:nvPr/>
+        </p:nvSpPr>
+        <p:spPr>
+          <a:xfrm>
+            <a:off x="4023360" y="2011680"/>
+            <a:ext cx="420624" cy="457200"/>
+          </a:xfrm>
+          <a:prstGeom prst="rect">
+            <a:avLst/>
+          </a:prstGeom>
+          <a:noFill/>
+        </p:spPr>
+        <p:txBody>
+          <a:bodyPr wrap="none">
+            <a:spAutoFit/>
+          </a:bodyPr>
+          <a:lstStyle/>
+          <a:p>
+            <a:pPr algn="ctr">
+              <a:defRPr sz="2000" b="1">
+                <a:solidFill>
+                  <a:srgbClr val="0284C7"/>
+                </a:solidFill>
+                <a:latin typeface="Segoe UI"/>
+              </a:defRPr>
+            </a:pPr>
+            <a:r>
+              <a:t>➔</a:t>
+            </a:r>
+          </a:p>
+        </p:txBody>
+      </p:sp>
+      <p:sp>
+        <p:nvSpPr>
+          <p:cNvPr id="8" name="Rectangle 7"/>
+          <p:cNvSpPr/>
+          <p:nvPr/>
+        </p:nvSpPr>
+        <p:spPr>
+          <a:xfrm>
+            <a:off x="4443984" y="1508760"/>
+            <a:ext cx="3291840" cy="1508760"/>
+          </a:xfrm>
+          <a:prstGeom prst="rect">
+            <a:avLst/>
+          </a:prstGeom>
+          <a:solidFill>
+            <a:srgbClr val="FFFFFF"/>
+          </a:solidFill>
+          <a:ln w="19050">
+            <a:solidFill>
+              <a:srgbClr val="0F172A"/>
+            </a:solidFill>
+          </a:ln>
+        </p:spPr>
+        <p:style>
+          <a:lnRef idx="1">
+            <a:schemeClr val="accent1"/>
+          </a:lnRef>
+          <a:fillRef idx="3">
+            <a:schemeClr val="accent1"/>
+          </a:fillRef>
+          <a:effectRef idx="2">
+            <a:schemeClr val="accent1"/>
+          </a:effectRef>
+          <a:fontRef idx="minor">
+            <a:schemeClr val="lt1"/>
+          </a:fontRef>
+        </p:style>
+        <p:txBody>
+          <a:bodyPr rtlCol="0" anchor="ctr" wrap="square" lIns="164592" tIns="109728"/>
+          <a:lstStyle/>
+          <a:p>
+            <a:pPr algn="ctr">
+              <a:spcAft>
+                <a:spcPts val="300"/>
+              </a:spcAft>
+              <a:defRPr sz="1050" b="1">
+                <a:solidFill>
+                  <a:srgbClr val="0F172A"/>
+                </a:solidFill>
+                <a:latin typeface="Segoe UI"/>
+              </a:defRPr>
+            </a:pPr>
+            <a:r>
+              <a:t>02 • APPLICATION TIER</a:t>
+            </a:r>
+          </a:p>
+          <a:p>
+            <a:pPr>
+              <a:spcAft>
+                <a:spcPts val="400"/>
+              </a:spcAft>
+              <a:defRPr sz="1500" b="1">
+                <a:solidFill>
+                  <a:srgbClr val="0F172A"/>
+                </a:solidFill>
+                <a:latin typeface="Segoe UI"/>
+              </a:defRPr>
+            </a:pPr>
+            <a:r>
+              <a:t>Python Flask REST Backend</a:t>
+            </a:r>
+          </a:p>
+          <a:p>
+            <a:pPr>
+              <a:defRPr sz="1100">
+                <a:solidFill>
+                  <a:srgbClr val="334155"/>
+                </a:solidFill>
+                <a:latin typeface="Segoe UI"/>
+              </a:defRPr>
+            </a:pPr>
+            <a:r>
+              <a:t>Application Factory Pattern, Blueprint Routes (Auth, Users, Attendance, Results), RBAC Decorators</a:t>
+            </a:r>
+          </a:p>
+        </p:txBody>
+      </p:sp>
+      <p:sp>
+        <p:nvSpPr>
+          <p:cNvPr id="9" name="TextBox 8"/>
+          <p:cNvSpPr txBox="1"/>
+          <p:nvPr/>
+        </p:nvSpPr>
+        <p:spPr>
+          <a:xfrm>
+            <a:off x="7735824" y="2011680"/>
+            <a:ext cx="420624" cy="457200"/>
+          </a:xfrm>
+          <a:prstGeom prst="rect">
+            <a:avLst/>
+          </a:prstGeom>
+          <a:noFill/>
+        </p:spPr>
+        <p:txBody>
+          <a:bodyPr wrap="none">
+            <a:spAutoFit/>
+          </a:bodyPr>
+          <a:lstStyle/>
+          <a:p>
+            <a:pPr algn="ctr">
+              <a:defRPr sz="2000" b="1">
+                <a:solidFill>
+                  <a:srgbClr val="0284C7"/>
+                </a:solidFill>
+                <a:latin typeface="Segoe UI"/>
+              </a:defRPr>
+            </a:pPr>
+            <a:r>
+              <a:t>➔</a:t>
+            </a:r>
+          </a:p>
+        </p:txBody>
+      </p:sp>
+      <p:sp>
+        <p:nvSpPr>
+          <p:cNvPr id="10" name="Rectangle 9"/>
+          <p:cNvSpPr/>
+          <p:nvPr/>
+        </p:nvSpPr>
+        <p:spPr>
+          <a:xfrm>
+            <a:off x="8156448" y="1508760"/>
+            <a:ext cx="3291840" cy="1508760"/>
+          </a:xfrm>
+          <a:prstGeom prst="rect">
+            <a:avLst/>
+          </a:prstGeom>
+          <a:solidFill>
+            <a:srgbClr val="FFFFFF"/>
+          </a:solidFill>
+          <a:ln w="19050">
+            <a:solidFill>
+              <a:srgbClr val="10B981"/>
+            </a:solidFill>
+          </a:ln>
+        </p:spPr>
+        <p:style>
+          <a:lnRef idx="1">
+            <a:schemeClr val="accent1"/>
+          </a:lnRef>
+          <a:fillRef idx="3">
+            <a:schemeClr val="accent1"/>
+          </a:fillRef>
+          <a:effectRef idx="2">
+            <a:schemeClr val="accent1"/>
+          </a:effectRef>
+          <a:fontRef idx="minor">
+            <a:schemeClr val="lt1"/>
+          </a:fontRef>
+        </p:style>
+        <p:txBody>
+          <a:bodyPr rtlCol="0" anchor="ctr" wrap="square" lIns="164592" tIns="109728"/>
+          <a:lstStyle/>
+          <a:p>
+            <a:pPr algn="ctr">
+              <a:spcAft>
+                <a:spcPts val="300"/>
+              </a:spcAft>
+              <a:defRPr sz="1050" b="1">
+                <a:solidFill>
+                  <a:srgbClr val="10B981"/>
+                </a:solidFill>
+                <a:latin typeface="Segoe UI"/>
+              </a:defRPr>
+            </a:pPr>
+            <a:r>
+              <a:t>03 • PERSISTENCE TIER</a:t>
+            </a:r>
+          </a:p>
+          <a:p>
+            <a:pPr>
+              <a:spcAft>
+                <a:spcPts val="400"/>
+              </a:spcAft>
+              <a:defRPr sz="1500" b="1">
+                <a:solidFill>
+                  <a:srgbClr val="0F172A"/>
+                </a:solidFill>
+                <a:latin typeface="Segoe UI"/>
+              </a:defRPr>
+            </a:pPr>
+            <a:r>
+              <a:t>PostgreSQL Cloud Database</a:t>
+            </a:r>
+          </a:p>
+          <a:p>
+            <a:pPr>
+              <a:defRPr sz="1100">
+                <a:solidFill>
+                  <a:srgbClr val="334155"/>
+                </a:solidFill>
+                <a:latin typeface="Segoe UI"/>
+              </a:defRPr>
+            </a:pPr>
+            <a:r>
+              <a:t>SQLAlchemy 2.0 ORM, Alembic Migrations, Declarative Models, Connection Pooling, Zero Mock Fallback</a:t>
+            </a:r>
+          </a:p>
+        </p:txBody>
+      </p:sp>
+      <p:sp>
+        <p:nvSpPr>
+          <p:cNvPr id="11" name="Rectangle 10"/>
+          <p:cNvSpPr/>
+          <p:nvPr/>
+        </p:nvSpPr>
+        <p:spPr>
+          <a:xfrm>
+            <a:off x="731520" y="3246120"/>
+            <a:ext cx="2514600" cy="2971800"/>
           </a:xfrm>
           <a:prstGeom prst="rect">
             <a:avLst/>
@@ -4305,20 +4692,20 @@
       </p:sp>
       <p:sp>
         <p:nvSpPr>
-          <p:cNvPr id="7" name="Rectangle 6"/>
+          <p:cNvPr id="12" name="Rectangle 11"/>
           <p:cNvSpPr/>
           <p:nvPr/>
         </p:nvSpPr>
         <p:spPr>
           <a:xfrm>
-            <a:off x="731520" y="1417320"/>
-            <a:ext cx="2514600" cy="548640"/>
+            <a:off x="731520" y="3246120"/>
+            <a:ext cx="2514600" cy="502920"/>
           </a:xfrm>
           <a:prstGeom prst="rect">
             <a:avLst/>
           </a:prstGeom>
           <a:solidFill>
-            <a:srgbClr val="1E3A8A"/>
+            <a:srgbClr val="0284C7"/>
           </a:solidFill>
           <a:ln>
             <a:noFill/>
@@ -4348,14 +4735,14 @@
       </p:sp>
       <p:sp>
         <p:nvSpPr>
-          <p:cNvPr id="8" name="TextBox 7"/>
+          <p:cNvPr id="13" name="TextBox 12"/>
           <p:cNvSpPr txBox="1"/>
           <p:nvPr/>
         </p:nvSpPr>
         <p:spPr>
           <a:xfrm>
-            <a:off x="731520" y="1463040"/>
-            <a:ext cx="2514600" cy="457200"/>
+            <a:off x="731520" y="3291840"/>
+            <a:ext cx="2514600" cy="411480"/>
           </a:xfrm>
           <a:prstGeom prst="rect">
             <a:avLst/>
@@ -4363,13 +4750,13 @@
           <a:noFill/>
         </p:spPr>
         <p:txBody>
-          <a:bodyPr wrap="square">
+          <a:bodyPr wrap="none">
             <a:spAutoFit/>
           </a:bodyPr>
           <a:lstStyle/>
           <a:p>
             <a:pPr algn="ctr">
-              <a:defRPr sz="1000" b="1">
+              <a:defRPr sz="1100" b="1">
                 <a:solidFill>
                   <a:srgbClr val="FFFFFF"/>
                 </a:solidFill>
@@ -4377,21 +4764,21 @@
               </a:defRPr>
             </a:pPr>
             <a:r>
-              <a:t>01 • CLIENT INTERFACE</a:t>
-            </a:r>
-          </a:p>
-        </p:txBody>
-      </p:sp>
-      <p:sp>
-        <p:nvSpPr>
-          <p:cNvPr id="9" name="TextBox 8"/>
+              <a:t>FRONTEND STACK</a:t>
+            </a:r>
+          </a:p>
+        </p:txBody>
+      </p:sp>
+      <p:sp>
+        <p:nvSpPr>
+          <p:cNvPr id="14" name="TextBox 13"/>
           <p:cNvSpPr txBox="1"/>
           <p:nvPr/>
         </p:nvSpPr>
         <p:spPr>
           <a:xfrm>
-            <a:off x="841248" y="2011680"/>
-            <a:ext cx="2295144" cy="2971800"/>
+            <a:off x="841248" y="3822191"/>
+            <a:ext cx="2295144" cy="2286000"/>
           </a:xfrm>
           <a:prstGeom prst="rect">
             <a:avLst/>
@@ -4406,9 +4793,9 @@
           <a:p>
             <a:pPr>
               <a:spcAft>
-                <a:spcPts val="800"/>
+                <a:spcPts val="600"/>
               </a:spcAft>
-              <a:defRPr sz="1200" b="1">
+              <a:defRPr sz="1300" b="1">
                 <a:solidFill>
                   <a:srgbClr val="0F172A"/>
                 </a:solidFill>
@@ -4416,20 +4803,7 @@
               </a:defRPr>
             </a:pPr>
             <a:r>
-              <a:t>Frontend Architecture</a:t>
-            </a:r>
-          </a:p>
-          <a:p>
-            <a:pPr>
-              <a:defRPr sz="950" b="1">
-                <a:solidFill>
-                  <a:srgbClr val="0F172A"/>
-                </a:solidFill>
-                <a:latin typeface="Segoe UI"/>
-              </a:defRPr>
-            </a:pPr>
-            <a:r>
-              <a:t>• HTML5 Semantic UI:</a:t>
+              <a:t>Semantic Web UI</a:t>
             </a:r>
           </a:p>
           <a:p>
@@ -4437,28 +4811,15 @@
               <a:spcAft>
                 <a:spcPts val="400"/>
               </a:spcAft>
-              <a:defRPr sz="850">
-                <a:solidFill>
-                  <a:srgbClr val="64748B"/>
-                </a:solidFill>
-                <a:latin typeface="Segoe UI"/>
-              </a:defRPr>
-            </a:pPr>
-            <a:r>
-              <a:t>  Accessible, structured document layout tailored for academic dashboards.</a:t>
-            </a:r>
-          </a:p>
-          <a:p>
-            <a:pPr>
-              <a:defRPr sz="950" b="1">
-                <a:solidFill>
-                  <a:srgbClr val="0F172A"/>
-                </a:solidFill>
-                <a:latin typeface="Segoe UI"/>
-              </a:defRPr>
-            </a:pPr>
-            <a:r>
-              <a:t>• Vanilla CSS3:</a:t>
+              <a:defRPr sz="1000">
+                <a:solidFill>
+                  <a:srgbClr val="334155"/>
+                </a:solidFill>
+                <a:latin typeface="Segoe UI"/>
+              </a:defRPr>
+            </a:pPr>
+            <a:r>
+              <a:t>• HTML5 Semantic UI: Clean document layout built for accessibility.</a:t>
             </a:r>
           </a:p>
           <a:p>
@@ -4466,28 +4827,15 @@
               <a:spcAft>
                 <a:spcPts val="400"/>
               </a:spcAft>
-              <a:defRPr sz="850">
-                <a:solidFill>
-                  <a:srgbClr val="64748B"/>
-                </a:solidFill>
-                <a:latin typeface="Segoe UI"/>
-              </a:defRPr>
-            </a:pPr>
-            <a:r>
-              <a:t>  Design system with customized slate tokens, CSS variables, zero Tailwind overhead.</a:t>
-            </a:r>
-          </a:p>
-          <a:p>
-            <a:pPr>
-              <a:defRPr sz="950" b="1">
-                <a:solidFill>
-                  <a:srgbClr val="0F172A"/>
-                </a:solidFill>
-                <a:latin typeface="Segoe UI"/>
-              </a:defRPr>
-            </a:pPr>
-            <a:r>
-              <a:t>• Vanilla JavaScript (ES6):</a:t>
+              <a:defRPr sz="1000">
+                <a:solidFill>
+                  <a:srgbClr val="334155"/>
+                </a:solidFill>
+                <a:latin typeface="Segoe UI"/>
+              </a:defRPr>
+            </a:pPr>
+            <a:r>
+              <a:t>• Vanilla CSS3 Tokens: Slate &amp; navy academic palette; zero framework bloat.</a:t>
             </a:r>
           </a:p>
           <a:p>
@@ -4495,28 +4843,15 @@
               <a:spcAft>
                 <a:spcPts val="400"/>
               </a:spcAft>
-              <a:defRPr sz="850">
-                <a:solidFill>
-                  <a:srgbClr val="64748B"/>
-                </a:solidFill>
-                <a:latin typeface="Segoe UI"/>
-              </a:defRPr>
-            </a:pPr>
-            <a:r>
-              <a:t>  Lightweight, modular fetch client handling REST APIs and DOM rendering.</a:t>
-            </a:r>
-          </a:p>
-          <a:p>
-            <a:pPr>
-              <a:defRPr sz="950" b="1">
-                <a:solidFill>
-                  <a:srgbClr val="0F172A"/>
-                </a:solidFill>
-                <a:latin typeface="Segoe UI"/>
-              </a:defRPr>
-            </a:pPr>
-            <a:r>
-              <a:t>• Multi-Tab Isolation:</a:t>
+              <a:defRPr sz="1000">
+                <a:solidFill>
+                  <a:srgbClr val="334155"/>
+                </a:solidFill>
+                <a:latin typeface="Segoe UI"/>
+              </a:defRPr>
+            </a:pPr>
+            <a:r>
+              <a:t>• Vanilla JavaScript (ES6): Native fetch API client handling dynamic DOM updates.</a:t>
             </a:r>
           </a:p>
           <a:p>
@@ -4524,29 +4859,29 @@
               <a:spcAft>
                 <a:spcPts val="400"/>
               </a:spcAft>
-              <a:defRPr sz="850">
-                <a:solidFill>
-                  <a:srgbClr val="64748B"/>
-                </a:solidFill>
-                <a:latin typeface="Segoe UI"/>
-              </a:defRPr>
-            </a:pPr>
-            <a:r>
-              <a:t>  Hybrid sessionStorage and localStorage token management preventing logout collisions.</a:t>
-            </a:r>
-          </a:p>
-        </p:txBody>
-      </p:sp>
-      <p:sp>
-        <p:nvSpPr>
-          <p:cNvPr id="10" name="Rectangle 9"/>
+              <a:defRPr sz="1000">
+                <a:solidFill>
+                  <a:srgbClr val="334155"/>
+                </a:solidFill>
+                <a:latin typeface="Segoe UI"/>
+              </a:defRPr>
+            </a:pPr>
+            <a:r>
+              <a:t>• Multi-Tab Isolation: Session token isolation preventing accidental logouts.</a:t>
+            </a:r>
+          </a:p>
+        </p:txBody>
+      </p:sp>
+      <p:sp>
+        <p:nvSpPr>
+          <p:cNvPr id="15" name="Rectangle 14"/>
           <p:cNvSpPr/>
           <p:nvPr/>
         </p:nvSpPr>
         <p:spPr>
           <a:xfrm>
-            <a:off x="3465576" y="1417320"/>
-            <a:ext cx="2514600" cy="3657600"/>
+            <a:off x="3465576" y="3246120"/>
+            <a:ext cx="2514600" cy="2971800"/>
           </a:xfrm>
           <a:prstGeom prst="rect">
             <a:avLst/>
@@ -4584,20 +4919,20 @@
       </p:sp>
       <p:sp>
         <p:nvSpPr>
-          <p:cNvPr id="11" name="Rectangle 10"/>
+          <p:cNvPr id="16" name="Rectangle 15"/>
           <p:cNvSpPr/>
           <p:nvPr/>
         </p:nvSpPr>
         <p:spPr>
           <a:xfrm>
-            <a:off x="3465576" y="1417320"/>
-            <a:ext cx="2514600" cy="548640"/>
+            <a:off x="3465576" y="3246120"/>
+            <a:ext cx="2514600" cy="502920"/>
           </a:xfrm>
           <a:prstGeom prst="rect">
             <a:avLst/>
           </a:prstGeom>
           <a:solidFill>
-            <a:srgbClr val="2563EB"/>
+            <a:srgbClr val="0F172A"/>
           </a:solidFill>
           <a:ln>
             <a:noFill/>
@@ -4627,14 +4962,14 @@
       </p:sp>
       <p:sp>
         <p:nvSpPr>
-          <p:cNvPr id="12" name="TextBox 11"/>
+          <p:cNvPr id="17" name="TextBox 16"/>
           <p:cNvSpPr txBox="1"/>
           <p:nvPr/>
         </p:nvSpPr>
         <p:spPr>
           <a:xfrm>
-            <a:off x="3465576" y="1463040"/>
-            <a:ext cx="2514600" cy="457200"/>
+            <a:off x="3465576" y="3291840"/>
+            <a:ext cx="2514600" cy="411480"/>
           </a:xfrm>
           <a:prstGeom prst="rect">
             <a:avLst/>
@@ -4642,13 +4977,13 @@
           <a:noFill/>
         </p:spPr>
         <p:txBody>
-          <a:bodyPr wrap="square">
+          <a:bodyPr wrap="none">
             <a:spAutoFit/>
           </a:bodyPr>
           <a:lstStyle/>
           <a:p>
             <a:pPr algn="ctr">
-              <a:defRPr sz="1000" b="1">
+              <a:defRPr sz="1100" b="1">
                 <a:solidFill>
                   <a:srgbClr val="FFFFFF"/>
                 </a:solidFill>
@@ -4656,21 +4991,21 @@
               </a:defRPr>
             </a:pPr>
             <a:r>
-              <a:t>02 • APPLICATION LAYER</a:t>
-            </a:r>
-          </a:p>
-        </p:txBody>
-      </p:sp>
-      <p:sp>
-        <p:nvSpPr>
-          <p:cNvPr id="13" name="TextBox 12"/>
+              <a:t>BACKEND FRAMEWORK</a:t>
+            </a:r>
+          </a:p>
+        </p:txBody>
+      </p:sp>
+      <p:sp>
+        <p:nvSpPr>
+          <p:cNvPr id="18" name="TextBox 17"/>
           <p:cNvSpPr txBox="1"/>
           <p:nvPr/>
         </p:nvSpPr>
         <p:spPr>
           <a:xfrm>
-            <a:off x="3575304" y="2011680"/>
-            <a:ext cx="2295144" cy="2971800"/>
+            <a:off x="3575304" y="3822191"/>
+            <a:ext cx="2295144" cy="2286000"/>
           </a:xfrm>
           <a:prstGeom prst="rect">
             <a:avLst/>
@@ -4685,9 +5020,9 @@
           <a:p>
             <a:pPr>
               <a:spcAft>
-                <a:spcPts val="800"/>
+                <a:spcPts val="600"/>
               </a:spcAft>
-              <a:defRPr sz="1200" b="1">
+              <a:defRPr sz="1300" b="1">
                 <a:solidFill>
                   <a:srgbClr val="0F172A"/>
                 </a:solidFill>
@@ -4695,20 +5030,7 @@
               </a:defRPr>
             </a:pPr>
             <a:r>
-              <a:t>Flask REST Backend</a:t>
-            </a:r>
-          </a:p>
-          <a:p>
-            <a:pPr>
-              <a:defRPr sz="950" b="1">
-                <a:solidFill>
-                  <a:srgbClr val="0F172A"/>
-                </a:solidFill>
-                <a:latin typeface="Segoe UI"/>
-              </a:defRPr>
-            </a:pPr>
-            <a:r>
-              <a:t>• Python 3.11 + Flask:</a:t>
+              <a:t>Python Flask Engine</a:t>
             </a:r>
           </a:p>
           <a:p>
@@ -4716,28 +5038,15 @@
               <a:spcAft>
                 <a:spcPts val="400"/>
               </a:spcAft>
-              <a:defRPr sz="850">
-                <a:solidFill>
-                  <a:srgbClr val="64748B"/>
-                </a:solidFill>
-                <a:latin typeface="Segoe UI"/>
-              </a:defRPr>
-            </a:pPr>
-            <a:r>
-              <a:t>  Lightweight micro-framework utilizing the Application Factory design pattern.</a:t>
-            </a:r>
-          </a:p>
-          <a:p>
-            <a:pPr>
-              <a:defRPr sz="950" b="1">
-                <a:solidFill>
-                  <a:srgbClr val="0F172A"/>
-                </a:solidFill>
-                <a:latin typeface="Segoe UI"/>
-              </a:defRPr>
-            </a:pPr>
-            <a:r>
-              <a:t>• Modular Blueprints:</a:t>
+              <a:defRPr sz="1000">
+                <a:solidFill>
+                  <a:srgbClr val="334155"/>
+                </a:solidFill>
+                <a:latin typeface="Segoe UI"/>
+              </a:defRPr>
+            </a:pPr>
+            <a:r>
+              <a:t>• Python 3.11 Runtime: High execution speed and modern async support.</a:t>
             </a:r>
           </a:p>
           <a:p>
@@ -4745,28 +5054,15 @@
               <a:spcAft>
                 <a:spcPts val="400"/>
               </a:spcAft>
-              <a:defRPr sz="850">
-                <a:solidFill>
-                  <a:srgbClr val="64748B"/>
-                </a:solidFill>
-                <a:latin typeface="Segoe UI"/>
-              </a:defRPr>
-            </a:pPr>
-            <a:r>
-              <a:t>  Separation of concerns: auth, users, attendance, results, assignments, notices, events.</a:t>
-            </a:r>
-          </a:p>
-          <a:p>
-            <a:pPr>
-              <a:defRPr sz="950" b="1">
-                <a:solidFill>
-                  <a:srgbClr val="0F172A"/>
-                </a:solidFill>
-                <a:latin typeface="Segoe UI"/>
-              </a:defRPr>
-            </a:pPr>
-            <a:r>
-              <a:t>• RBAC &amp; Security Decorators:</a:t>
+              <a:defRPr sz="1000">
+                <a:solidFill>
+                  <a:srgbClr val="334155"/>
+                </a:solidFill>
+                <a:latin typeface="Segoe UI"/>
+              </a:defRPr>
+            </a:pPr>
+            <a:r>
+              <a:t>• Application Factory: Modular create_app() design with clean configuration.</a:t>
             </a:r>
           </a:p>
           <a:p>
@@ -4774,28 +5070,15 @@
               <a:spcAft>
                 <a:spcPts val="400"/>
               </a:spcAft>
-              <a:defRPr sz="850">
-                <a:solidFill>
-                  <a:srgbClr val="64748B"/>
-                </a:solidFill>
-                <a:latin typeface="Segoe UI"/>
-              </a:defRPr>
-            </a:pPr>
-            <a:r>
-              <a:t>  @login_required &amp; @role_required enforcing strict route authorization.</a:t>
-            </a:r>
-          </a:p>
-          <a:p>
-            <a:pPr>
-              <a:defRPr sz="950" b="1">
-                <a:solidFill>
-                  <a:srgbClr val="0F172A"/>
-                </a:solidFill>
-                <a:latin typeface="Segoe UI"/>
-              </a:defRPr>
-            </a:pPr>
-            <a:r>
-              <a:t>• Password Security:</a:t>
+              <a:defRPr sz="1000">
+                <a:solidFill>
+                  <a:srgbClr val="334155"/>
+                </a:solidFill>
+                <a:latin typeface="Segoe UI"/>
+              </a:defRPr>
+            </a:pPr>
+            <a:r>
+              <a:t>• Modular Blueprints: Separation of concerns: auth, users, attendance, results.</a:t>
             </a:r>
           </a:p>
           <a:p>
@@ -4803,29 +5086,29 @@
               <a:spcAft>
                 <a:spcPts val="400"/>
               </a:spcAft>
-              <a:defRPr sz="850">
-                <a:solidFill>
-                  <a:srgbClr val="64748B"/>
-                </a:solidFill>
-                <a:latin typeface="Segoe UI"/>
-              </a:defRPr>
-            </a:pPr>
-            <a:r>
-              <a:t>  Werkzeug PBKDF2 hashing with salted credentials across all accounts.</a:t>
-            </a:r>
-          </a:p>
-        </p:txBody>
-      </p:sp>
-      <p:sp>
-        <p:nvSpPr>
-          <p:cNvPr id="14" name="Rectangle 13"/>
+              <a:defRPr sz="1000">
+                <a:solidFill>
+                  <a:srgbClr val="334155"/>
+                </a:solidFill>
+                <a:latin typeface="Segoe UI"/>
+              </a:defRPr>
+            </a:pPr>
+            <a:r>
+              <a:t>• PBKDF2 Security: Salted password hashing with Werkzeug security utilities.</a:t>
+            </a:r>
+          </a:p>
+        </p:txBody>
+      </p:sp>
+      <p:sp>
+        <p:nvSpPr>
+          <p:cNvPr id="19" name="Rectangle 18"/>
           <p:cNvSpPr/>
           <p:nvPr/>
         </p:nvSpPr>
         <p:spPr>
           <a:xfrm>
-            <a:off x="6199632" y="1417320"/>
-            <a:ext cx="2514600" cy="3657600"/>
+            <a:off x="6199632" y="3246120"/>
+            <a:ext cx="2514600" cy="2971800"/>
           </a:xfrm>
           <a:prstGeom prst="rect">
             <a:avLst/>
@@ -4863,14 +5146,14 @@
       </p:sp>
       <p:sp>
         <p:nvSpPr>
-          <p:cNvPr id="15" name="Rectangle 14"/>
+          <p:cNvPr id="20" name="Rectangle 19"/>
           <p:cNvSpPr/>
           <p:nvPr/>
         </p:nvSpPr>
         <p:spPr>
           <a:xfrm>
-            <a:off x="6199632" y="1417320"/>
-            <a:ext cx="2514600" cy="548640"/>
+            <a:off x="6199632" y="3246120"/>
+            <a:ext cx="2514600" cy="502920"/>
           </a:xfrm>
           <a:prstGeom prst="rect">
             <a:avLst/>
@@ -4906,14 +5189,14 @@
       </p:sp>
       <p:sp>
         <p:nvSpPr>
-          <p:cNvPr id="16" name="TextBox 15"/>
+          <p:cNvPr id="21" name="TextBox 20"/>
           <p:cNvSpPr txBox="1"/>
           <p:nvPr/>
         </p:nvSpPr>
         <p:spPr>
           <a:xfrm>
-            <a:off x="6199632" y="1463040"/>
-            <a:ext cx="2514600" cy="457200"/>
+            <a:off x="6199632" y="3291840"/>
+            <a:ext cx="2514600" cy="411480"/>
           </a:xfrm>
           <a:prstGeom prst="rect">
             <a:avLst/>
@@ -4921,13 +5204,13 @@
           <a:noFill/>
         </p:spPr>
         <p:txBody>
-          <a:bodyPr wrap="square">
+          <a:bodyPr wrap="none">
             <a:spAutoFit/>
           </a:bodyPr>
           <a:lstStyle/>
           <a:p>
             <a:pPr algn="ctr">
-              <a:defRPr sz="1000" b="1">
+              <a:defRPr sz="1100" b="1">
                 <a:solidFill>
                   <a:srgbClr val="FFFFFF"/>
                 </a:solidFill>
@@ -4935,21 +5218,21 @@
               </a:defRPr>
             </a:pPr>
             <a:r>
-              <a:t>03 • DATA PERSISTENCE</a:t>
-            </a:r>
-          </a:p>
-        </p:txBody>
-      </p:sp>
-      <p:sp>
-        <p:nvSpPr>
-          <p:cNvPr id="17" name="TextBox 16"/>
+              <a:t>DATABASE &amp; ORM</a:t>
+            </a:r>
+          </a:p>
+        </p:txBody>
+      </p:sp>
+      <p:sp>
+        <p:nvSpPr>
+          <p:cNvPr id="22" name="TextBox 21"/>
           <p:cNvSpPr txBox="1"/>
           <p:nvPr/>
         </p:nvSpPr>
         <p:spPr>
           <a:xfrm>
-            <a:off x="6309360" y="2011680"/>
-            <a:ext cx="2295144" cy="2971800"/>
+            <a:off x="6309360" y="3822191"/>
+            <a:ext cx="2295144" cy="2286000"/>
           </a:xfrm>
           <a:prstGeom prst="rect">
             <a:avLst/>
@@ -4964,9 +5247,9 @@
           <a:p>
             <a:pPr>
               <a:spcAft>
-                <a:spcPts val="800"/>
+                <a:spcPts val="600"/>
               </a:spcAft>
-              <a:defRPr sz="1200" b="1">
+              <a:defRPr sz="1300" b="1">
                 <a:solidFill>
                   <a:srgbClr val="0F172A"/>
                 </a:solidFill>
@@ -4975,19 +5258,6 @@
             </a:pPr>
             <a:r>
               <a:t>PostgreSQL &amp; SQLAlchemy</a:t>
-            </a:r>
-          </a:p>
-          <a:p>
-            <a:pPr>
-              <a:defRPr sz="950" b="1">
-                <a:solidFill>
-                  <a:srgbClr val="0F172A"/>
-                </a:solidFill>
-                <a:latin typeface="Segoe UI"/>
-              </a:defRPr>
-            </a:pPr>
-            <a:r>
-              <a:t>• PostgreSQL Database:</a:t>
             </a:r>
           </a:p>
           <a:p>
@@ -4995,28 +5265,15 @@
               <a:spcAft>
                 <a:spcPts val="400"/>
               </a:spcAft>
-              <a:defRPr sz="850">
-                <a:solidFill>
-                  <a:srgbClr val="64748B"/>
-                </a:solidFill>
-                <a:latin typeface="Segoe UI"/>
-              </a:defRPr>
-            </a:pPr>
-            <a:r>
-              <a:t>  Relational database hosted on Render Cloud with high reliability.</a:t>
-            </a:r>
-          </a:p>
-          <a:p>
-            <a:pPr>
-              <a:defRPr sz="950" b="1">
-                <a:solidFill>
-                  <a:srgbClr val="0F172A"/>
-                </a:solidFill>
-                <a:latin typeface="Segoe UI"/>
-              </a:defRPr>
-            </a:pPr>
-            <a:r>
-              <a:t>• SQLAlchemy 2.0 ORM:</a:t>
+              <a:defRPr sz="1000">
+                <a:solidFill>
+                  <a:srgbClr val="334155"/>
+                </a:solidFill>
+                <a:latin typeface="Segoe UI"/>
+              </a:defRPr>
+            </a:pPr>
+            <a:r>
+              <a:t>• PostgreSQL Database: Reliable relational cloud storage hosted on Render.</a:t>
             </a:r>
           </a:p>
           <a:p>
@@ -5024,28 +5281,15 @@
               <a:spcAft>
                 <a:spcPts val="400"/>
               </a:spcAft>
-              <a:defRPr sz="850">
-                <a:solidFill>
-                  <a:srgbClr val="64748B"/>
-                </a:solidFill>
-                <a:latin typeface="Segoe UI"/>
-              </a:defRPr>
-            </a:pPr>
-            <a:r>
-              <a:t>  Declarative schema models with cascade deletion and relational integrity.</a:t>
-            </a:r>
-          </a:p>
-          <a:p>
-            <a:pPr>
-              <a:defRPr sz="950" b="1">
-                <a:solidFill>
-                  <a:srgbClr val="0F172A"/>
-                </a:solidFill>
-                <a:latin typeface="Segoe UI"/>
-              </a:defRPr>
-            </a:pPr>
-            <a:r>
-              <a:t>• Alembic Migrations:</a:t>
+              <a:defRPr sz="1000">
+                <a:solidFill>
+                  <a:srgbClr val="334155"/>
+                </a:solidFill>
+                <a:latin typeface="Segoe UI"/>
+              </a:defRPr>
+            </a:pPr>
+            <a:r>
+              <a:t>• SQLAlchemy 2.0 ORM: Declarative schema models with cascade deletion rules.</a:t>
             </a:r>
           </a:p>
           <a:p>
@@ -5053,28 +5297,15 @@
               <a:spcAft>
                 <a:spcPts val="400"/>
               </a:spcAft>
-              <a:defRPr sz="850">
-                <a:solidFill>
-                  <a:srgbClr val="64748B"/>
-                </a:solidFill>
-                <a:latin typeface="Segoe UI"/>
-              </a:defRPr>
-            </a:pPr>
-            <a:r>
-              <a:t>  Strict schema version control ensuring seamless zero-downtime upgrades.</a:t>
-            </a:r>
-          </a:p>
-          <a:p>
-            <a:pPr>
-              <a:defRPr sz="950" b="1">
-                <a:solidFill>
-                  <a:srgbClr val="0F172A"/>
-                </a:solidFill>
-                <a:latin typeface="Segoe UI"/>
-              </a:defRPr>
-            </a:pPr>
-            <a:r>
-              <a:t>• Zero Mock Fallback:</a:t>
+              <a:defRPr sz="1000">
+                <a:solidFill>
+                  <a:srgbClr val="334155"/>
+                </a:solidFill>
+                <a:latin typeface="Segoe UI"/>
+              </a:defRPr>
+            </a:pPr>
+            <a:r>
+              <a:t>• Alembic Migrations: Controlled database schema upgrades and rollback safety.</a:t>
             </a:r>
           </a:p>
           <a:p>
@@ -5082,29 +5313,29 @@
               <a:spcAft>
                 <a:spcPts val="400"/>
               </a:spcAft>
-              <a:defRPr sz="850">
-                <a:solidFill>
-                  <a:srgbClr val="64748B"/>
-                </a:solidFill>
-                <a:latin typeface="Segoe UI"/>
-              </a:defRPr>
-            </a:pPr>
-            <a:r>
-              <a:t>  All views directly bound to genuine SQL records with honest empty states.</a:t>
-            </a:r>
-          </a:p>
-        </p:txBody>
-      </p:sp>
-      <p:sp>
-        <p:nvSpPr>
-          <p:cNvPr id="18" name="Rectangle 17"/>
+              <a:defRPr sz="1000">
+                <a:solidFill>
+                  <a:srgbClr val="334155"/>
+                </a:solidFill>
+                <a:latin typeface="Segoe UI"/>
+              </a:defRPr>
+            </a:pPr>
+            <a:r>
+              <a:t>• Zero Mock Fallback: Every view directly queries live SQL tables.</a:t>
+            </a:r>
+          </a:p>
+        </p:txBody>
+      </p:sp>
+      <p:sp>
+        <p:nvSpPr>
+          <p:cNvPr id="23" name="Rectangle 22"/>
           <p:cNvSpPr/>
           <p:nvPr/>
         </p:nvSpPr>
         <p:spPr>
           <a:xfrm>
-            <a:off x="8933688" y="1417320"/>
-            <a:ext cx="2514600" cy="3657600"/>
+            <a:off x="8933688" y="3246120"/>
+            <a:ext cx="2514600" cy="2971800"/>
           </a:xfrm>
           <a:prstGeom prst="rect">
             <a:avLst/>
@@ -5142,20 +5373,20 @@
       </p:sp>
       <p:sp>
         <p:nvSpPr>
-          <p:cNvPr id="19" name="Rectangle 18"/>
+          <p:cNvPr id="24" name="Rectangle 23"/>
           <p:cNvSpPr/>
           <p:nvPr/>
         </p:nvSpPr>
         <p:spPr>
           <a:xfrm>
-            <a:off x="8933688" y="1417320"/>
-            <a:ext cx="2514600" cy="548640"/>
+            <a:off x="8933688" y="3246120"/>
+            <a:ext cx="2514600" cy="502920"/>
           </a:xfrm>
           <a:prstGeom prst="rect">
             <a:avLst/>
           </a:prstGeom>
           <a:solidFill>
-            <a:srgbClr val="D97706"/>
+            <a:srgbClr val="0891B2"/>
           </a:solidFill>
           <a:ln>
             <a:noFill/>
@@ -5185,14 +5416,14 @@
       </p:sp>
       <p:sp>
         <p:nvSpPr>
-          <p:cNvPr id="20" name="TextBox 19"/>
+          <p:cNvPr id="25" name="TextBox 24"/>
           <p:cNvSpPr txBox="1"/>
           <p:nvPr/>
         </p:nvSpPr>
         <p:spPr>
           <a:xfrm>
-            <a:off x="8933688" y="1463040"/>
-            <a:ext cx="2514600" cy="457200"/>
+            <a:off x="8933688" y="3291840"/>
+            <a:ext cx="2514600" cy="411480"/>
           </a:xfrm>
           <a:prstGeom prst="rect">
             <a:avLst/>
@@ -5200,13 +5431,13 @@
           <a:noFill/>
         </p:spPr>
         <p:txBody>
-          <a:bodyPr wrap="square">
+          <a:bodyPr wrap="none">
             <a:spAutoFit/>
           </a:bodyPr>
           <a:lstStyle/>
           <a:p>
             <a:pPr algn="ctr">
-              <a:defRPr sz="1000" b="1">
+              <a:defRPr sz="1100" b="1">
                 <a:solidFill>
                   <a:srgbClr val="FFFFFF"/>
                 </a:solidFill>
@@ -5214,21 +5445,21 @@
               </a:defRPr>
             </a:pPr>
             <a:r>
-              <a:t>04 • DEPLOYMENT &amp; HOSTING</a:t>
-            </a:r>
-          </a:p>
-        </p:txBody>
-      </p:sp>
-      <p:sp>
-        <p:nvSpPr>
-          <p:cNvPr id="21" name="TextBox 20"/>
+              <a:t>DEVOPS &amp; DEPLOYMENT</a:t>
+            </a:r>
+          </a:p>
+        </p:txBody>
+      </p:sp>
+      <p:sp>
+        <p:nvSpPr>
+          <p:cNvPr id="26" name="TextBox 25"/>
           <p:cNvSpPr txBox="1"/>
           <p:nvPr/>
         </p:nvSpPr>
         <p:spPr>
           <a:xfrm>
-            <a:off x="9043416" y="2011680"/>
-            <a:ext cx="2295144" cy="2971800"/>
+            <a:off x="9043416" y="3822191"/>
+            <a:ext cx="2295144" cy="2286000"/>
           </a:xfrm>
           <a:prstGeom prst="rect">
             <a:avLst/>
@@ -5243,9 +5474,9 @@
           <a:p>
             <a:pPr>
               <a:spcAft>
-                <a:spcPts val="800"/>
+                <a:spcPts val="600"/>
               </a:spcAft>
-              <a:defRPr sz="1200" b="1">
+              <a:defRPr sz="1300" b="1">
                 <a:solidFill>
                   <a:srgbClr val="0F172A"/>
                 </a:solidFill>
@@ -5253,20 +5484,7 @@
               </a:defRPr>
             </a:pPr>
             <a:r>
-              <a:t>Production DevOps</a:t>
-            </a:r>
-          </a:p>
-          <a:p>
-            <a:pPr>
-              <a:defRPr sz="950" b="1">
-                <a:solidFill>
-                  <a:srgbClr val="0F172A"/>
-                </a:solidFill>
-                <a:latin typeface="Segoe UI"/>
-              </a:defRPr>
-            </a:pPr>
-            <a:r>
-              <a:t>• Render Web Service:</a:t>
+              <a:t>Production Cloud Stack</a:t>
             </a:r>
           </a:p>
           <a:p>
@@ -5274,28 +5492,15 @@
               <a:spcAft>
                 <a:spcPts val="400"/>
               </a:spcAft>
-              <a:defRPr sz="850">
-                <a:solidFill>
-                  <a:srgbClr val="64748B"/>
-                </a:solidFill>
-                <a:latin typeface="Segoe UI"/>
-              </a:defRPr>
-            </a:pPr>
-            <a:r>
-              <a:t>  Automated continuous delivery synchronized with GitHub main branch.</a:t>
-            </a:r>
-          </a:p>
-          <a:p>
-            <a:pPr>
-              <a:defRPr sz="950" b="1">
-                <a:solidFill>
-                  <a:srgbClr val="0F172A"/>
-                </a:solidFill>
-                <a:latin typeface="Segoe UI"/>
-              </a:defRPr>
-            </a:pPr>
-            <a:r>
-              <a:t>• Gunicorn WSGI Server:</a:t>
+              <a:defRPr sz="1000">
+                <a:solidFill>
+                  <a:srgbClr val="334155"/>
+                </a:solidFill>
+                <a:latin typeface="Segoe UI"/>
+              </a:defRPr>
+            </a:pPr>
+            <a:r>
+              <a:t>• Render Web Service: Continuous deployment synced with GitHub main.</a:t>
             </a:r>
           </a:p>
           <a:p>
@@ -5303,28 +5508,15 @@
               <a:spcAft>
                 <a:spcPts val="400"/>
               </a:spcAft>
-              <a:defRPr sz="850">
-                <a:solidFill>
-                  <a:srgbClr val="64748B"/>
-                </a:solidFill>
-                <a:latin typeface="Segoe UI"/>
-              </a:defRPr>
-            </a:pPr>
-            <a:r>
-              <a:t>  Production multi-worker WSGI HTTP server handling concurrent requests.</a:t>
-            </a:r>
-          </a:p>
-          <a:p>
-            <a:pPr>
-              <a:defRPr sz="950" b="1">
-                <a:solidFill>
-                  <a:srgbClr val="0F172A"/>
-                </a:solidFill>
-                <a:latin typeface="Segoe UI"/>
-              </a:defRPr>
-            </a:pPr>
-            <a:r>
-              <a:t>• ProxyFix Middleware:</a:t>
+              <a:defRPr sz="1000">
+                <a:solidFill>
+                  <a:srgbClr val="334155"/>
+                </a:solidFill>
+                <a:latin typeface="Segoe UI"/>
+              </a:defRPr>
+            </a:pPr>
+            <a:r>
+              <a:t>• Gunicorn WSGI Server: Multi-worker WSGI server managing concurrent requests.</a:t>
             </a:r>
           </a:p>
           <a:p>
@@ -5332,28 +5524,15 @@
               <a:spcAft>
                 <a:spcPts val="400"/>
               </a:spcAft>
-              <a:defRPr sz="850">
-                <a:solidFill>
-                  <a:srgbClr val="64748B"/>
-                </a:solidFill>
-                <a:latin typeface="Segoe UI"/>
-              </a:defRPr>
-            </a:pPr>
-            <a:r>
-              <a:t>  Reverse proxy header correction for secure HTTPS redirection and cookies.</a:t>
-            </a:r>
-          </a:p>
-          <a:p>
-            <a:pPr>
-              <a:defRPr sz="950" b="1">
-                <a:solidFill>
-                  <a:srgbClr val="0F172A"/>
-                </a:solidFill>
-                <a:latin typeface="Segoe UI"/>
-              </a:defRPr>
-            </a:pPr>
-            <a:r>
-              <a:t>• Environment Hygiene:</a:t>
+              <a:defRPr sz="1000">
+                <a:solidFill>
+                  <a:srgbClr val="334155"/>
+                </a:solidFill>
+                <a:latin typeface="Segoe UI"/>
+              </a:defRPr>
+            </a:pPr>
+            <a:r>
+              <a:t>• ProxyFix Middleware: Proper HTTPS reverse-proxy header handling.</a:t>
             </a:r>
           </a:p>
           <a:p>
@@ -5361,124 +5540,15 @@
               <a:spcAft>
                 <a:spcPts val="400"/>
               </a:spcAft>
-              <a:defRPr sz="850">
-                <a:solidFill>
-                  <a:srgbClr val="64748B"/>
-                </a:solidFill>
-                <a:latin typeface="Segoe UI"/>
-              </a:defRPr>
-            </a:pPr>
-            <a:r>
-              <a:t>  Strict credential isolation through environment variables (.env).</a:t>
-            </a:r>
-          </a:p>
-        </p:txBody>
-      </p:sp>
-      <p:sp>
-        <p:nvSpPr>
-          <p:cNvPr id="22" name="Rectangle 21"/>
-          <p:cNvSpPr/>
-          <p:nvPr/>
-        </p:nvSpPr>
-        <p:spPr>
-          <a:xfrm>
-            <a:off x="731520" y="5212080"/>
-            <a:ext cx="10728655" cy="1097280"/>
-          </a:xfrm>
-          <a:prstGeom prst="rect">
-            <a:avLst/>
-          </a:prstGeom>
-          <a:solidFill>
-            <a:srgbClr val="0F172A"/>
-          </a:solidFill>
-          <a:ln w="12700">
-            <a:solidFill>
-              <a:srgbClr val="334155"/>
-            </a:solidFill>
-          </a:ln>
-        </p:spPr>
-        <p:style>
-          <a:lnRef idx="1">
-            <a:schemeClr val="accent1"/>
-          </a:lnRef>
-          <a:fillRef idx="3">
-            <a:schemeClr val="accent1"/>
-          </a:fillRef>
-          <a:effectRef idx="2">
-            <a:schemeClr val="accent1"/>
-          </a:effectRef>
-          <a:fontRef idx="minor">
-            <a:schemeClr val="lt1"/>
-          </a:fontRef>
-        </p:style>
-        <p:txBody>
-          <a:bodyPr rtlCol="0" anchor="ctr"/>
-          <a:lstStyle/>
-          <a:p>
-            <a:pPr algn="ctr"/>
-          </a:p>
-        </p:txBody>
-      </p:sp>
-      <p:sp>
-        <p:nvSpPr>
-          <p:cNvPr id="23" name="TextBox 22"/>
-          <p:cNvSpPr txBox="1"/>
-          <p:nvPr/>
-        </p:nvSpPr>
-        <p:spPr>
-          <a:xfrm>
-            <a:off x="822960" y="5257800"/>
-            <a:ext cx="10545775" cy="1005840"/>
-          </a:xfrm>
-          <a:prstGeom prst="rect">
-            <a:avLst/>
-          </a:prstGeom>
-          <a:noFill/>
-        </p:spPr>
-        <p:txBody>
-          <a:bodyPr wrap="square">
-            <a:spAutoFit/>
-          </a:bodyPr>
-          <a:lstStyle/>
-          <a:p>
-            <a:pPr>
-              <a:spcAft>
-                <a:spcPts val="400"/>
-              </a:spcAft>
-              <a:defRPr sz="1000" b="1">
-                <a:solidFill>
-                  <a:srgbClr val="10B981"/>
-                </a:solidFill>
-                <a:latin typeface="Segoe UI"/>
-              </a:defRPr>
-            </a:pPr>
-            <a:r>
-              <a:t>DATA FLOW &amp; REQUEST EXECUTION PIPELINE</a:t>
-            </a:r>
-          </a:p>
-          <a:p>
-            <a:pPr>
-              <a:defRPr sz="850">
-                <a:solidFill>
-                  <a:srgbClr val="E2E8F0"/>
-                </a:solidFill>
-                <a:latin typeface="Consolas"/>
-              </a:defRPr>
-            </a:pPr>
-            <a:r>
-              <a:t>[Student / Faculty / Admin Client]  ──(HTTPS / REST JSON)──►  [Gunicorn WSGI + ProxyFix]  ──►  [Flask Application Factory &amp; Route Blueprints]</a:t>
-            </a:r>
-            <a:br/>
-            <a:r>
-              <a:t>                                                                                                              │ (RBAC Decorators &amp; Token Auth)</a:t>
-            </a:r>
-            <a:br/>
-            <a:r>
-              <a:t>                                                                                                              ▼</a:t>
-            </a:r>
-            <a:br/>
-            <a:r>
-              <a:t>[PostgreSQL Cloud Database (Render)]  ◄──(SQLAlchemy 2.0 ORM Engine &amp; Session Pool)───  [Models: User, Attendance, Result, Assignment]</a:t>
+              <a:defRPr sz="1000">
+                <a:solidFill>
+                  <a:srgbClr val="334155"/>
+                </a:solidFill>
+                <a:latin typeface="Segoe UI"/>
+              </a:defRPr>
+            </a:pPr>
+            <a:r>
+              <a:t>• Environment Hygiene: Isolated configuration using environment variables (.env).</a:t>
             </a:r>
           </a:p>
         </p:txBody>
@@ -5553,7 +5623,7 @@
         <p:spPr>
           <a:xfrm>
             <a:off x="731520" y="365760"/>
-            <a:ext cx="10728655" cy="868680"/>
+            <a:ext cx="10728655" cy="1005840"/>
           </a:xfrm>
           <a:prstGeom prst="rect">
             <a:avLst/>
@@ -5586,20 +5656,20 @@
           <a:lstStyle/>
           <a:p>
             <a:pPr algn="ctr">
-              <a:defRPr sz="950" b="1">
-                <a:solidFill>
-                  <a:srgbClr val="2563EB"/>
-                </a:solidFill>
-                <a:latin typeface="Segoe UI"/>
-              </a:defRPr>
-            </a:pPr>
-            <a:r>
-              <a:t>ADMINISTRATION MODULE</a:t>
-            </a:r>
-          </a:p>
-          <a:p>
-            <a:pPr>
-              <a:defRPr sz="1800" b="1">
+              <a:defRPr sz="1100" b="1">
+                <a:solidFill>
+                  <a:srgbClr val="0891B2"/>
+                </a:solidFill>
+                <a:latin typeface="Segoe UI"/>
+              </a:defRPr>
+            </a:pPr>
+            <a:r>
+              <a:t>CORE MANAGEMENT MODULE</a:t>
+            </a:r>
+          </a:p>
+          <a:p>
+            <a:pPr>
+              <a:defRPr sz="2800" b="1">
                 <a:solidFill>
                   <a:srgbClr val="0F172A"/>
                 </a:solidFill>
@@ -5607,7 +5677,7 @@
               </a:defRPr>
             </a:pPr>
             <a:r>
-              <a:t>Administrative Control &amp; Campus User Directory</a:t>
+              <a:t>Centralized Administration &amp; Campus User Directory</a:t>
             </a:r>
           </a:p>
         </p:txBody>
@@ -5621,7 +5691,7 @@
         <p:spPr>
           <a:xfrm>
             <a:off x="9601200" y="502920"/>
-            <a:ext cx="1645920" cy="365760"/>
+            <a:ext cx="1645920" cy="411480"/>
           </a:xfrm>
           <a:prstGeom prst="rect">
             <a:avLst/>
@@ -5635,9 +5705,9 @@
           <a:lstStyle/>
           <a:p>
             <a:pPr algn="r">
-              <a:defRPr sz="1100" b="1">
-                <a:solidFill>
-                  <a:srgbClr val="64748B"/>
+              <a:defRPr sz="1300" b="1">
+                <a:solidFill>
+                  <a:srgbClr val="0284C7"/>
                 </a:solidFill>
                 <a:latin typeface="Segoe UI"/>
               </a:defRPr>
@@ -5656,8 +5726,8 @@
         </p:nvSpPr>
         <p:spPr>
           <a:xfrm>
-            <a:off x="731520" y="6492240"/>
-            <a:ext cx="10728655" cy="274320"/>
+            <a:off x="731520" y="6400800"/>
+            <a:ext cx="10728655" cy="320040"/>
           </a:xfrm>
           <a:prstGeom prst="rect">
             <a:avLst/>
@@ -5671,7 +5741,7 @@
           <a:lstStyle/>
           <a:p>
             <a:pPr>
-              <a:defRPr sz="900">
+              <a:defRPr sz="1050">
                 <a:solidFill>
                   <a:srgbClr val="64748B"/>
                 </a:solidFill>
@@ -5679,14 +5749,59 @@
               </a:defRPr>
             </a:pPr>
             <a:r>
-              <a:t>Campus Connect ERP • Sharad Institute of Technology College of Engineering, Yadrav (SITCOE) • Live PostgreSQL Production System</a:t>
-            </a:r>
+              <a:t>Campus Connect ERP • Sharad Institute of Technology College of Engineering (SITCOE) • Live PostgreSQL Production System</a:t>
+            </a:r>
+          </a:p>
+        </p:txBody>
+      </p:sp>
+      <p:sp>
+        <p:nvSpPr>
+          <p:cNvPr id="6" name="Rectangle 5"/>
+          <p:cNvSpPr/>
+          <p:nvPr/>
+        </p:nvSpPr>
+        <p:spPr>
+          <a:xfrm>
+            <a:off x="731520" y="1508760"/>
+            <a:ext cx="5760720" cy="4167378"/>
+          </a:xfrm>
+          <a:prstGeom prst="rect">
+            <a:avLst/>
+          </a:prstGeom>
+          <a:solidFill>
+            <a:srgbClr val="FFFFFF"/>
+          </a:solidFill>
+          <a:ln w="12700">
+            <a:solidFill>
+              <a:srgbClr val="E2E8F0"/>
+            </a:solidFill>
+          </a:ln>
+        </p:spPr>
+        <p:style>
+          <a:lnRef idx="1">
+            <a:schemeClr val="accent1"/>
+          </a:lnRef>
+          <a:fillRef idx="3">
+            <a:schemeClr val="accent1"/>
+          </a:fillRef>
+          <a:effectRef idx="2">
+            <a:schemeClr val="accent1"/>
+          </a:effectRef>
+          <a:fontRef idx="minor">
+            <a:schemeClr val="lt1"/>
+          </a:fontRef>
+        </p:style>
+        <p:txBody>
+          <a:bodyPr rtlCol="0" anchor="ctr"/>
+          <a:lstStyle/>
+          <a:p>
+            <a:pPr algn="ctr"/>
           </a:p>
         </p:txBody>
       </p:sp>
       <p:pic>
         <p:nvPicPr>
-          <p:cNvPr id="6" name="Picture 5" descr="02_admin_dashboard.png"/>
+          <p:cNvPr id="7" name="Picture 6" descr="03_user_directory.png"/>
           <p:cNvPicPr>
             <a:picLocks noChangeAspect="1"/>
           </p:cNvPicPr>
@@ -5700,48 +5815,73 @@
         </p:blipFill>
         <p:spPr>
           <a:xfrm>
-            <a:off x="731520" y="1417320"/>
-            <a:ext cx="5486400" cy="3429000"/>
+            <a:off x="804672" y="1581912"/>
+            <a:ext cx="5614416" cy="3509010"/>
           </a:xfrm>
           <a:prstGeom prst="rect">
             <a:avLst/>
           </a:prstGeom>
         </p:spPr>
       </p:pic>
-      <p:pic>
-        <p:nvPicPr>
-          <p:cNvPr id="7" name="Picture 6" descr="03_user_directory.png"/>
-          <p:cNvPicPr>
-            <a:picLocks noChangeAspect="1"/>
-          </p:cNvPicPr>
+      <p:sp>
+        <p:nvSpPr>
+          <p:cNvPr id="8" name="TextBox 7"/>
+          <p:cNvSpPr txBox="1"/>
           <p:nvPr/>
-        </p:nvPicPr>
-        <p:blipFill>
-          <a:blip r:embed="rId3"/>
-          <a:stretch>
-            <a:fillRect/>
-          </a:stretch>
-        </p:blipFill>
-        <p:spPr>
-          <a:xfrm>
-            <a:off x="731520" y="3886200"/>
-            <a:ext cx="5486400" cy="3429000"/>
+        </p:nvSpPr>
+        <p:spPr>
+          <a:xfrm>
+            <a:off x="822960" y="5090922"/>
+            <a:ext cx="5577840" cy="512064"/>
           </a:xfrm>
           <a:prstGeom prst="rect">
             <a:avLst/>
           </a:prstGeom>
-        </p:spPr>
-      </p:pic>
-      <p:sp>
-        <p:nvSpPr>
-          <p:cNvPr id="8" name="Rectangle 7"/>
+          <a:noFill/>
+        </p:spPr>
+        <p:txBody>
+          <a:bodyPr wrap="square" tIns="36576" bIns="18288" lIns="18288" rIns="18288">
+            <a:spAutoFit/>
+          </a:bodyPr>
+          <a:lstStyle/>
+          <a:p>
+            <a:pPr>
+              <a:defRPr sz="1050" b="1">
+                <a:solidFill>
+                  <a:srgbClr val="0F172A"/>
+                </a:solidFill>
+                <a:latin typeface="Segoe UI"/>
+              </a:defRPr>
+            </a:pPr>
+            <a:r>
+              <a:t>Figure 1: Campus User Directory displaying verified SITCOE student &amp; faculty database records</a:t>
+            </a:r>
+          </a:p>
+          <a:p>
+            <a:pPr>
+              <a:defRPr sz="950">
+                <a:solidFill>
+                  <a:srgbClr val="0891B2"/>
+                </a:solidFill>
+                <a:latin typeface="Segoe UI"/>
+              </a:defRPr>
+            </a:pPr>
+            <a:r>
+              <a:t>Live Relational Data: PRN 24101099, 24101005 • Faculty Code FAC-TEST-01 • Computer Science Dept</a:t>
+            </a:r>
+          </a:p>
+        </p:txBody>
+      </p:sp>
+      <p:sp>
+        <p:nvSpPr>
+          <p:cNvPr id="9" name="Rectangle 8"/>
           <p:cNvSpPr/>
           <p:nvPr/>
         </p:nvSpPr>
         <p:spPr>
           <a:xfrm>
-            <a:off x="6446520" y="1417320"/>
-            <a:ext cx="5010912" cy="4892040"/>
+            <a:off x="731520" y="5760720"/>
+            <a:ext cx="5760720" cy="502920"/>
           </a:xfrm>
           <a:prstGeom prst="rect">
             <a:avLst/>
@@ -5770,27 +5910,111 @@
           </a:fontRef>
         </p:style>
         <p:txBody>
-          <a:bodyPr rtlCol="0" anchor="ctr" wrap="square" lIns="274320" rIns="274320" tIns="228600"/>
+          <a:bodyPr rtlCol="0" anchor="ctr" lIns="137160" tIns="73152"/>
           <a:lstStyle/>
           <a:p>
             <a:pPr algn="ctr">
+              <a:defRPr sz="1050" b="1">
+                <a:solidFill>
+                  <a:srgbClr val="0284C7"/>
+                </a:solidFill>
+                <a:latin typeface="Segoe UI"/>
+              </a:defRPr>
+            </a:pPr>
+            <a:r>
+              <a:t>⚡ Relational Schema Status: 100% Synced • 2 Students • 3 Faculty • 19 Courses • 6 Depts</a:t>
+            </a:r>
+          </a:p>
+        </p:txBody>
+      </p:sp>
+      <p:sp>
+        <p:nvSpPr>
+          <p:cNvPr id="10" name="Rectangle 9"/>
+          <p:cNvSpPr/>
+          <p:nvPr/>
+        </p:nvSpPr>
+        <p:spPr>
+          <a:xfrm>
+            <a:off x="6766560" y="1508760"/>
+            <a:ext cx="4663440" cy="4754880"/>
+          </a:xfrm>
+          <a:prstGeom prst="rect">
+            <a:avLst/>
+          </a:prstGeom>
+          <a:solidFill>
+            <a:srgbClr val="FFFFFF"/>
+          </a:solidFill>
+          <a:ln w="12700">
+            <a:solidFill>
+              <a:srgbClr val="E2E8F0"/>
+            </a:solidFill>
+          </a:ln>
+        </p:spPr>
+        <p:style>
+          <a:lnRef idx="1">
+            <a:schemeClr val="accent1"/>
+          </a:lnRef>
+          <a:fillRef idx="3">
+            <a:schemeClr val="accent1"/>
+          </a:fillRef>
+          <a:effectRef idx="2">
+            <a:schemeClr val="accent1"/>
+          </a:effectRef>
+          <a:fontRef idx="minor">
+            <a:schemeClr val="lt1"/>
+          </a:fontRef>
+        </p:style>
+        <p:txBody>
+          <a:bodyPr rtlCol="0" anchor="ctr" wrap="square" lIns="274320" rIns="274320" tIns="201168"/>
+          <a:lstStyle/>
+          <a:p>
+            <a:pPr algn="ctr">
+              <a:spcAft>
+                <a:spcPts val="1200"/>
+              </a:spcAft>
+              <a:defRPr sz="1300" b="1">
+                <a:solidFill>
+                  <a:srgbClr val="0284C7"/>
+                </a:solidFill>
+                <a:latin typeface="Segoe UI"/>
+              </a:defRPr>
+            </a:pPr>
+            <a:r>
+              <a:t>🏛️ VERIFIED ADMINISTRATIVE CAPABILITIES</a:t>
+            </a:r>
+          </a:p>
+          <a:p>
+            <a:pPr>
+              <a:defRPr sz="1500" b="1">
+                <a:solidFill>
+                  <a:srgbClr val="0F172A"/>
+                </a:solidFill>
+                <a:latin typeface="Segoe UI"/>
+              </a:defRPr>
+            </a:pPr>
+            <a:r>
+              <a:t>✔ Institutional Health &amp; KPI Metrics</a:t>
+            </a:r>
+          </a:p>
+          <a:p>
+            <a:pPr>
               <a:spcAft>
                 <a:spcPts val="1000"/>
               </a:spcAft>
-              <a:defRPr sz="1300" b="1">
-                <a:solidFill>
-                  <a:srgbClr val="2563EB"/>
-                </a:solidFill>
-                <a:latin typeface="Segoe UI"/>
-              </a:defRPr>
-            </a:pPr>
-            <a:r>
-              <a:t>🏛️ CENTRALIZED CAMPUS GOVERNANCE</a:t>
-            </a:r>
-          </a:p>
-          <a:p>
-            <a:pPr>
-              <a:defRPr sz="1050" b="1">
+              <a:defRPr sz="1200">
+                <a:solidFill>
+                  <a:srgbClr val="334155"/>
+                </a:solidFill>
+                <a:latin typeface="Segoe UI"/>
+              </a:defRPr>
+            </a:pPr>
+            <a:r>
+              <a:t>  The Admin Dashboard aggregates real-time metrics across SITCOE: Total Enrolled Students (2), Teaching Faculty (3), Active Courses (19), and 6 Engineering Departments with 100% operational status.</a:t>
+            </a:r>
+          </a:p>
+          <a:p>
+            <a:pPr>
+              <a:defRPr sz="1500" b="1">
                 <a:solidFill>
                   <a:srgbClr val="0F172A"/>
                 </a:solidFill>
@@ -5798,28 +6022,28 @@
               </a:defRPr>
             </a:pPr>
             <a:r>
-              <a:t>✔ Institutional Overview &amp; Live KPI Metrics</a:t>
+              <a:t>✔ Unified Campus Member Ledger</a:t>
             </a:r>
           </a:p>
           <a:p>
             <a:pPr>
               <a:spcAft>
-                <a:spcPts val="800"/>
+                <a:spcPts val="1000"/>
               </a:spcAft>
-              <a:defRPr sz="950">
-                <a:solidFill>
-                  <a:srgbClr val="64748B"/>
-                </a:solidFill>
-                <a:latin typeface="Segoe UI"/>
-              </a:defRPr>
-            </a:pPr>
-            <a:r>
-              <a:t>  The Admin Dashboard aggregates real-time metrics across the institution: Total Enrolled Students (2), Teaching Faculty (3), Active Courses (19), Engineering Departments (6), and 100% System Health.</a:t>
-            </a:r>
-          </a:p>
-          <a:p>
-            <a:pPr>
-              <a:defRPr sz="1050" b="1">
+              <a:defRPr sz="1200">
+                <a:solidFill>
+                  <a:srgbClr val="334155"/>
+                </a:solidFill>
+                <a:latin typeface="Segoe UI"/>
+              </a:defRPr>
+            </a:pPr>
+            <a:r>
+              <a:t>  Directly couples authentication credentials with Student and Faculty academic profiles. Eliminates orphan records and guarantees complete profile referential integrity.</a:t>
+            </a:r>
+          </a:p>
+          <a:p>
+            <a:pPr>
+              <a:defRPr sz="1500" b="1">
                 <a:solidFill>
                   <a:srgbClr val="0F172A"/>
                 </a:solidFill>
@@ -5827,28 +6051,28 @@
               </a:defRPr>
             </a:pPr>
             <a:r>
-              <a:t>✔ Centralized Campus User Directory</a:t>
+              <a:t>✔ Multi-Field Full-Text Search</a:t>
             </a:r>
           </a:p>
           <a:p>
             <a:pPr>
               <a:spcAft>
-                <a:spcPts val="800"/>
+                <a:spcPts val="1000"/>
               </a:spcAft>
-              <a:defRPr sz="950">
-                <a:solidFill>
-                  <a:srgbClr val="64748B"/>
-                </a:solidFill>
-                <a:latin typeface="Segoe UI"/>
-              </a:defRPr>
-            </a:pPr>
-            <a:r>
-              <a:t>  Consolidated member ledger linking authentication accounts directly with Student and Faculty profiles. Eliminates detached data records and guarantees profile referential integrity.</a:t>
-            </a:r>
-          </a:p>
-          <a:p>
-            <a:pPr>
-              <a:defRPr sz="1050" b="1">
+              <a:defRPr sz="1200">
+                <a:solidFill>
+                  <a:srgbClr val="334155"/>
+                </a:solidFill>
+                <a:latin typeface="Segoe UI"/>
+              </a:defRPr>
+            </a:pPr>
+            <a:r>
+              <a:t>  Enables immediate member lookup by Full Name, Roll Number, PRN (e.g. 24101099, 24101005), Employee Code (FAC-TEST-01), or College Email address.</a:t>
+            </a:r>
+          </a:p>
+          <a:p>
+            <a:pPr>
+              <a:defRPr sz="1500" b="1">
                 <a:solidFill>
                   <a:srgbClr val="0F172A"/>
                 </a:solidFill>
@@ -5856,81 +6080,23 @@
               </a:defRPr>
             </a:pPr>
             <a:r>
-              <a:t>✔ Multi-Field Full-Text Search</a:t>
+              <a:t>✔ Departmental Filtering &amp; Role Governance</a:t>
             </a:r>
           </a:p>
           <a:p>
             <a:pPr>
               <a:spcAft>
-                <a:spcPts val="800"/>
+                <a:spcPts val="1000"/>
               </a:spcAft>
-              <a:defRPr sz="950">
-                <a:solidFill>
-                  <a:srgbClr val="64748B"/>
-                </a:solidFill>
-                <a:latin typeface="Segoe UI"/>
-              </a:defRPr>
-            </a:pPr>
-            <a:r>
-              <a:t>  Instant searching across student and faculty records by Full Name, Roll Number, PRN (e.g. 24101099, 24101005), Employee Code (FAC-TEST-01), or College Email address.</a:t>
-            </a:r>
-          </a:p>
-          <a:p>
-            <a:pPr>
-              <a:defRPr sz="1050" b="1">
-                <a:solidFill>
-                  <a:srgbClr val="0F172A"/>
-                </a:solidFill>
-                <a:latin typeface="Segoe UI"/>
-              </a:defRPr>
-            </a:pPr>
-            <a:r>
-              <a:t>✔ Granular Multi-Criteria Filtering</a:t>
-            </a:r>
-          </a:p>
-          <a:p>
-            <a:pPr>
-              <a:spcAft>
-                <a:spcPts val="800"/>
-              </a:spcAft>
-              <a:defRPr sz="950">
-                <a:solidFill>
-                  <a:srgbClr val="64748B"/>
-                </a:solidFill>
-                <a:latin typeface="Segoe UI"/>
-              </a:defRPr>
-            </a:pPr>
-            <a:r>
-              <a:t>  Filter registered campus members dynamically by Role (Admin, Faculty, Student), Academic Department (Computer Science &amp; Engineering), Semester, Class Division, and Status.</a:t>
-            </a:r>
-          </a:p>
-          <a:p>
-            <a:pPr>
-              <a:defRPr sz="1050" b="1">
-                <a:solidFill>
-                  <a:srgbClr val="0F172A"/>
-                </a:solidFill>
-                <a:latin typeface="Segoe UI"/>
-              </a:defRPr>
-            </a:pPr>
-            <a:r>
-              <a:t>✔ Authorized Member Actions &amp; Lifecycle</a:t>
-            </a:r>
-          </a:p>
-          <a:p>
-            <a:pPr>
-              <a:spcAft>
-                <a:spcPts val="800"/>
-              </a:spcAft>
-              <a:defRPr sz="950">
-                <a:solidFill>
-                  <a:srgbClr val="64748B"/>
-                </a:solidFill>
-                <a:latin typeface="Segoe UI"/>
-              </a:defRPr>
-            </a:pPr>
-            <a:r>
-              <a:t>  Administrators can inspect detailed member profiles, view official generated grade cards, manage academic enrollment status, and maintain system security.</a:t>
+              <a:defRPr sz="1200">
+                <a:solidFill>
+                  <a:srgbClr val="334155"/>
+                </a:solidFill>
+                <a:latin typeface="Segoe UI"/>
+              </a:defRPr>
+            </a:pPr>
+            <a:r>
+              <a:t>  Filter registered campus members dynamically by Role (Admin, Faculty, Student), Department (Computer Science &amp; Engineering), Semester, Class Division, and Active Status.</a:t>
             </a:r>
           </a:p>
         </p:txBody>
@@ -6005,7 +6171,7 @@
         <p:spPr>
           <a:xfrm>
             <a:off x="731520" y="365760"/>
-            <a:ext cx="10728655" cy="868680"/>
+            <a:ext cx="10728655" cy="1005840"/>
           </a:xfrm>
           <a:prstGeom prst="rect">
             <a:avLst/>
@@ -6038,20 +6204,20 @@
           <a:lstStyle/>
           <a:p>
             <a:pPr algn="ctr">
-              <a:defRPr sz="950" b="1">
-                <a:solidFill>
-                  <a:srgbClr val="2563EB"/>
-                </a:solidFill>
-                <a:latin typeface="Segoe UI"/>
-              </a:defRPr>
-            </a:pPr>
-            <a:r>
-              <a:t>ACADEMIC LIFECYCLE</a:t>
-            </a:r>
-          </a:p>
-          <a:p>
-            <a:pPr>
-              <a:defRPr sz="1800" b="1">
+              <a:defRPr sz="1100" b="1">
+                <a:solidFill>
+                  <a:srgbClr val="0891B2"/>
+                </a:solidFill>
+                <a:latin typeface="Segoe UI"/>
+              </a:defRPr>
+            </a:pPr>
+            <a:r>
+              <a:t>ACADEMIC WORKFLOWS</a:t>
+            </a:r>
+          </a:p>
+          <a:p>
+            <a:pPr>
+              <a:defRPr sz="2800" b="1">
                 <a:solidFill>
                   <a:srgbClr val="0F172A"/>
                 </a:solidFill>
@@ -6059,7 +6225,7 @@
               </a:defRPr>
             </a:pPr>
             <a:r>
-              <a:t>Academic Management: Attendance &amp; Examination Results</a:t>
+              <a:t>Academic Management: Attendance &amp; Examination Scoring</a:t>
             </a:r>
           </a:p>
         </p:txBody>
@@ -6073,7 +6239,7 @@
         <p:spPr>
           <a:xfrm>
             <a:off x="9601200" y="502920"/>
-            <a:ext cx="1645920" cy="365760"/>
+            <a:ext cx="1645920" cy="411480"/>
           </a:xfrm>
           <a:prstGeom prst="rect">
             <a:avLst/>
@@ -6087,9 +6253,9 @@
           <a:lstStyle/>
           <a:p>
             <a:pPr algn="r">
-              <a:defRPr sz="1100" b="1">
-                <a:solidFill>
-                  <a:srgbClr val="64748B"/>
+              <a:defRPr sz="1300" b="1">
+                <a:solidFill>
+                  <a:srgbClr val="0284C7"/>
                 </a:solidFill>
                 <a:latin typeface="Segoe UI"/>
               </a:defRPr>
@@ -6108,8 +6274,8 @@
         </p:nvSpPr>
         <p:spPr>
           <a:xfrm>
-            <a:off x="731520" y="6492240"/>
-            <a:ext cx="10728655" cy="274320"/>
+            <a:off x="731520" y="6400800"/>
+            <a:ext cx="10728655" cy="320040"/>
           </a:xfrm>
           <a:prstGeom prst="rect">
             <a:avLst/>
@@ -6123,7 +6289,7 @@
           <a:lstStyle/>
           <a:p>
             <a:pPr>
-              <a:defRPr sz="900">
+              <a:defRPr sz="1050">
                 <a:solidFill>
                   <a:srgbClr val="64748B"/>
                 </a:solidFill>
@@ -6131,14 +6297,59 @@
               </a:defRPr>
             </a:pPr>
             <a:r>
-              <a:t>Campus Connect ERP • Sharad Institute of Technology College of Engineering, Yadrav (SITCOE) • Live PostgreSQL Production System</a:t>
-            </a:r>
+              <a:t>Campus Connect ERP • Sharad Institute of Technology College of Engineering (SITCOE) • Live PostgreSQL Production System</a:t>
+            </a:r>
+          </a:p>
+        </p:txBody>
+      </p:sp>
+      <p:sp>
+        <p:nvSpPr>
+          <p:cNvPr id="6" name="Rectangle 5"/>
+          <p:cNvSpPr/>
+          <p:nvPr/>
+        </p:nvSpPr>
+        <p:spPr>
+          <a:xfrm>
+            <a:off x="731520" y="1508760"/>
+            <a:ext cx="5120640" cy="3767328"/>
+          </a:xfrm>
+          <a:prstGeom prst="rect">
+            <a:avLst/>
+          </a:prstGeom>
+          <a:solidFill>
+            <a:srgbClr val="FFFFFF"/>
+          </a:solidFill>
+          <a:ln w="12700">
+            <a:solidFill>
+              <a:srgbClr val="E2E8F0"/>
+            </a:solidFill>
+          </a:ln>
+        </p:spPr>
+        <p:style>
+          <a:lnRef idx="1">
+            <a:schemeClr val="accent1"/>
+          </a:lnRef>
+          <a:fillRef idx="3">
+            <a:schemeClr val="accent1"/>
+          </a:fillRef>
+          <a:effectRef idx="2">
+            <a:schemeClr val="accent1"/>
+          </a:effectRef>
+          <a:fontRef idx="minor">
+            <a:schemeClr val="lt1"/>
+          </a:fontRef>
+        </p:style>
+        <p:txBody>
+          <a:bodyPr rtlCol="0" anchor="ctr"/>
+          <a:lstStyle/>
+          <a:p>
+            <a:pPr algn="ctr"/>
           </a:p>
         </p:txBody>
       </p:sp>
       <p:pic>
         <p:nvPicPr>
-          <p:cNvPr id="6" name="Picture 5" descr="04_student_attendance.png"/>
+          <p:cNvPr id="7" name="Picture 6" descr="05_student_results.png"/>
           <p:cNvPicPr>
             <a:picLocks noChangeAspect="1"/>
           </p:cNvPicPr>
@@ -6152,17 +6363,111 @@
         </p:blipFill>
         <p:spPr>
           <a:xfrm>
-            <a:off x="731520" y="1417320"/>
-            <a:ext cx="5120640" cy="3200400"/>
+            <a:off x="804672" y="1581912"/>
+            <a:ext cx="4974336" cy="3108960"/>
           </a:xfrm>
           <a:prstGeom prst="rect">
             <a:avLst/>
           </a:prstGeom>
         </p:spPr>
       </p:pic>
+      <p:sp>
+        <p:nvSpPr>
+          <p:cNvPr id="8" name="TextBox 7"/>
+          <p:cNvSpPr txBox="1"/>
+          <p:nvPr/>
+        </p:nvSpPr>
+        <p:spPr>
+          <a:xfrm>
+            <a:off x="822960" y="4690872"/>
+            <a:ext cx="4937760" cy="512064"/>
+          </a:xfrm>
+          <a:prstGeom prst="rect">
+            <a:avLst/>
+          </a:prstGeom>
+          <a:noFill/>
+        </p:spPr>
+        <p:txBody>
+          <a:bodyPr wrap="square" tIns="36576" bIns="18288" lIns="18288" rIns="18288">
+            <a:spAutoFit/>
+          </a:bodyPr>
+          <a:lstStyle/>
+          <a:p>
+            <a:pPr>
+              <a:defRPr sz="1050" b="1">
+                <a:solidFill>
+                  <a:srgbClr val="0F172A"/>
+                </a:solidFill>
+                <a:latin typeface="Segoe UI"/>
+              </a:defRPr>
+            </a:pPr>
+            <a:r>
+              <a:t>Figure 2: Official Published Student Grade Card (Automated SGPA &amp; CGPA Calculation)</a:t>
+            </a:r>
+          </a:p>
+          <a:p>
+            <a:pPr>
+              <a:defRPr sz="950">
+                <a:solidFill>
+                  <a:srgbClr val="0891B2"/>
+                </a:solidFill>
+                <a:latin typeface="Segoe UI"/>
+              </a:defRPr>
+            </a:pPr>
+            <a:r>
+              <a:t>Verified Student: Aarav Sharma (PRN 24101099) • SGPA 8.93 (First Class) • Grade A</a:t>
+            </a:r>
+          </a:p>
+        </p:txBody>
+      </p:sp>
+      <p:sp>
+        <p:nvSpPr>
+          <p:cNvPr id="9" name="Rectangle 8"/>
+          <p:cNvSpPr/>
+          <p:nvPr/>
+        </p:nvSpPr>
+        <p:spPr>
+          <a:xfrm>
+            <a:off x="6309360" y="1508760"/>
+            <a:ext cx="5120640" cy="3767328"/>
+          </a:xfrm>
+          <a:prstGeom prst="rect">
+            <a:avLst/>
+          </a:prstGeom>
+          <a:solidFill>
+            <a:srgbClr val="FFFFFF"/>
+          </a:solidFill>
+          <a:ln w="12700">
+            <a:solidFill>
+              <a:srgbClr val="E2E8F0"/>
+            </a:solidFill>
+          </a:ln>
+        </p:spPr>
+        <p:style>
+          <a:lnRef idx="1">
+            <a:schemeClr val="accent1"/>
+          </a:lnRef>
+          <a:fillRef idx="3">
+            <a:schemeClr val="accent1"/>
+          </a:fillRef>
+          <a:effectRef idx="2">
+            <a:schemeClr val="accent1"/>
+          </a:effectRef>
+          <a:fontRef idx="minor">
+            <a:schemeClr val="lt1"/>
+          </a:fontRef>
+        </p:style>
+        <p:txBody>
+          <a:bodyPr rtlCol="0" anchor="ctr"/>
+          <a:lstStyle/>
+          <a:p>
+            <a:pPr algn="ctr"/>
+          </a:p>
+        </p:txBody>
+      </p:sp>
       <p:pic>
         <p:nvPicPr>
-          <p:cNvPr id="7" name="Picture 6" descr="06_faculty_results_management.png"/>
+          <p:cNvPr id="10" name="Picture 9" descr="06_faculty_results_management.png"/>
           <p:cNvPicPr>
             <a:picLocks noChangeAspect="1"/>
           </p:cNvPicPr>
@@ -6176,48 +6481,73 @@
         </p:blipFill>
         <p:spPr>
           <a:xfrm>
-            <a:off x="731520" y="3886200"/>
-            <a:ext cx="5120640" cy="3200400"/>
+            <a:off x="6382512" y="1581912"/>
+            <a:ext cx="4974336" cy="3108960"/>
           </a:xfrm>
           <a:prstGeom prst="rect">
             <a:avLst/>
           </a:prstGeom>
         </p:spPr>
       </p:pic>
-      <p:pic>
-        <p:nvPicPr>
-          <p:cNvPr id="8" name="Picture 7" descr="05_student_results.png"/>
-          <p:cNvPicPr>
-            <a:picLocks noChangeAspect="1"/>
-          </p:cNvPicPr>
+      <p:sp>
+        <p:nvSpPr>
+          <p:cNvPr id="11" name="TextBox 10"/>
+          <p:cNvSpPr txBox="1"/>
           <p:nvPr/>
-        </p:nvPicPr>
-        <p:blipFill>
-          <a:blip r:embed="rId4"/>
-          <a:stretch>
-            <a:fillRect/>
-          </a:stretch>
-        </p:blipFill>
-        <p:spPr>
-          <a:xfrm>
-            <a:off x="6080760" y="1417320"/>
-            <a:ext cx="5376672" cy="3360420"/>
+        </p:nvSpPr>
+        <p:spPr>
+          <a:xfrm>
+            <a:off x="6400800" y="4690872"/>
+            <a:ext cx="4937760" cy="512064"/>
           </a:xfrm>
           <a:prstGeom prst="rect">
             <a:avLst/>
           </a:prstGeom>
-        </p:spPr>
-      </p:pic>
-      <p:sp>
-        <p:nvSpPr>
-          <p:cNvPr id="9" name="Rectangle 8"/>
+          <a:noFill/>
+        </p:spPr>
+        <p:txBody>
+          <a:bodyPr wrap="square" tIns="36576" bIns="18288" lIns="18288" rIns="18288">
+            <a:spAutoFit/>
+          </a:bodyPr>
+          <a:lstStyle/>
+          <a:p>
+            <a:pPr>
+              <a:defRPr sz="1050" b="1">
+                <a:solidFill>
+                  <a:srgbClr val="0F172A"/>
+                </a:solidFill>
+                <a:latin typeface="Segoe UI"/>
+              </a:defRPr>
+            </a:pPr>
+            <a:r>
+              <a:t>Figure 3: Faculty Continuous Assessment Sheet (CA1, CA2, Mid-Sem, End-Sem)</a:t>
+            </a:r>
+          </a:p>
+          <a:p>
+            <a:pPr>
+              <a:defRPr sz="950">
+                <a:solidFill>
+                  <a:srgbClr val="0891B2"/>
+                </a:solidFill>
+                <a:latin typeface="Segoe UI"/>
+              </a:defRPr>
+            </a:pPr>
+            <a:r>
+              <a:t>Workflow: CS601 Software Eng (Div A) • Marks Entry &amp; Review Submission Console</a:t>
+            </a:r>
+          </a:p>
+        </p:txBody>
+      </p:sp>
+      <p:sp>
+        <p:nvSpPr>
+          <p:cNvPr id="12" name="Rectangle 11"/>
           <p:cNvSpPr/>
           <p:nvPr/>
         </p:nvSpPr>
         <p:spPr>
           <a:xfrm>
-            <a:off x="6080760" y="3977639"/>
-            <a:ext cx="5376672" cy="2331720"/>
+            <a:off x="731520" y="5440680"/>
+            <a:ext cx="10698480" cy="822960"/>
           </a:xfrm>
           <a:prstGeom prst="rect">
             <a:avLst/>
@@ -6246,30 +6576,27 @@
           </a:fontRef>
         </p:style>
         <p:txBody>
-          <a:bodyPr rtlCol="0" anchor="ctr" wrap="square" lIns="228600" rIns="228600" tIns="164592"/>
+          <a:bodyPr rtlCol="0" anchor="ctr" wrap="square" lIns="182880" tIns="73152"/>
           <a:lstStyle/>
           <a:p>
             <a:pPr algn="ctr">
               <a:spcAft>
-                <a:spcPts val="600"/>
+                <a:spcPts val="200"/>
               </a:spcAft>
               <a:defRPr sz="1100" b="1">
                 <a:solidFill>
-                  <a:srgbClr val="1E3A8A"/>
-                </a:solidFill>
-                <a:latin typeface="Segoe UI"/>
-              </a:defRPr>
-            </a:pPr>
-            <a:r>
-              <a:t>📊 VERIFIED ACADEMIC EVALUATION WORKFLOW</a:t>
-            </a:r>
-          </a:p>
-          <a:p>
-            <a:pPr>
-              <a:spcAft>
-                <a:spcPts val="400"/>
-              </a:spcAft>
-              <a:defRPr sz="900">
+                  <a:srgbClr val="0284C7"/>
+                </a:solidFill>
+                <a:latin typeface="Segoe UI"/>
+              </a:defRPr>
+            </a:pPr>
+            <a:r>
+              <a:t>VERIFIED ACADEMIC EVALUATION &amp; ATTENDANCE WORKFLOW:</a:t>
+            </a:r>
+          </a:p>
+          <a:p>
+            <a:pPr>
+              <a:defRPr sz="1000">
                 <a:solidFill>
                   <a:srgbClr val="0F172A"/>
                 </a:solidFill>
@@ -6277,39 +6604,15 @@
               </a:defRPr>
             </a:pPr>
             <a:r>
-              <a:t>• Real-Time Attendance Ledger: Live roll-call tracking per course (CS601 Software Eng, 23CS3601 ML, 23CS3602 Software Testing) with Present/Late/Absent metrics and automatic 75% board threshold compliance.</a:t>
-            </a:r>
-          </a:p>
-          <a:p>
-            <a:pPr>
-              <a:spcAft>
-                <a:spcPts val="400"/>
-              </a:spcAft>
-              <a:defRPr sz="900">
-                <a:solidFill>
-                  <a:srgbClr val="0F172A"/>
-                </a:solidFill>
-                <a:latin typeface="Segoe UI"/>
-              </a:defRPr>
-            </a:pPr>
-            <a:r>
-              <a:t>• 4-Tier Assessment System: Faculty marks entry sheet covering CA1 (20 pts), CA2 (20 pts), Mid-Sem (30 pts), and End-Sem (70 pts) with draft saving and administrative approval workflows.</a:t>
-            </a:r>
-          </a:p>
-          <a:p>
-            <a:pPr>
-              <a:spcAft>
-                <a:spcPts val="400"/>
-              </a:spcAft>
-              <a:defRPr sz="900">
-                <a:solidFill>
-                  <a:srgbClr val="0F172A"/>
-                </a:solidFill>
-                <a:latin typeface="Segoe UI"/>
-              </a:defRPr>
-            </a:pPr>
-            <a:r>
-              <a:t>• Official Student Grade Card: Automated total computation (125/100 weighted scale), letter grading (Grade A), SGPA &amp; CGPA calculation (8.93 First Class), and printable grade report generation.</a:t>
+              <a:t>• 4-Tier Assessment System: Faculty input raw scores for CA1 (20 pts), CA2 (20 pts), Mid-Sem (30 pts), and End-Sem (70 pts) with automated total calculation (125/100 scale).</a:t>
+            </a:r>
+            <a:br/>
+            <a:r>
+              <a:t>• Attendance Roll-Call Ledger: Course-wise session tracking (CS601, 23CS3601, 23CS3602) with automated 75% board threshold compliance monitoring.</a:t>
+            </a:r>
+            <a:br/>
+            <a:r>
+              <a:t>• Administrative Approval Workflow: Instructors save drafts and submit for review; Administrators approve and publish official, tamper-proof student grade reports.</a:t>
             </a:r>
           </a:p>
         </p:txBody>
@@ -6384,7 +6687,7 @@
         <p:spPr>
           <a:xfrm>
             <a:off x="731520" y="365760"/>
-            <a:ext cx="10728655" cy="868680"/>
+            <a:ext cx="10728655" cy="1005840"/>
           </a:xfrm>
           <a:prstGeom prst="rect">
             <a:avLst/>
@@ -6417,20 +6720,20 @@
           <a:lstStyle/>
           <a:p>
             <a:pPr algn="ctr">
-              <a:defRPr sz="950" b="1">
-                <a:solidFill>
-                  <a:srgbClr val="2563EB"/>
-                </a:solidFill>
-                <a:latin typeface="Segoe UI"/>
-              </a:defRPr>
-            </a:pPr>
-            <a:r>
-              <a:t>COLLABORATION &amp; SUBMISSIONS</a:t>
-            </a:r>
-          </a:p>
-          <a:p>
-            <a:pPr>
-              <a:defRPr sz="1800" b="1">
+              <a:defRPr sz="1100" b="1">
+                <a:solidFill>
+                  <a:srgbClr val="0891B2"/>
+                </a:solidFill>
+                <a:latin typeface="Segoe UI"/>
+              </a:defRPr>
+            </a:pPr>
+            <a:r>
+              <a:t>COLLABORATION &amp; SERVICES</a:t>
+            </a:r>
+          </a:p>
+          <a:p>
+            <a:pPr>
+              <a:defRPr sz="2800" b="1">
                 <a:solidFill>
                   <a:srgbClr val="0F172A"/>
                 </a:solidFill>
@@ -6438,7 +6741,7 @@
               </a:defRPr>
             </a:pPr>
             <a:r>
-              <a:t>Campus Collaboration: Notices, Events &amp; Coursework</a:t>
+              <a:t>Coursework Lifecycle &amp; Campus Announcements</a:t>
             </a:r>
           </a:p>
         </p:txBody>
@@ -6452,7 +6755,7 @@
         <p:spPr>
           <a:xfrm>
             <a:off x="9601200" y="502920"/>
-            <a:ext cx="1645920" cy="365760"/>
+            <a:ext cx="1645920" cy="411480"/>
           </a:xfrm>
           <a:prstGeom prst="rect">
             <a:avLst/>
@@ -6466,9 +6769,9 @@
           <a:lstStyle/>
           <a:p>
             <a:pPr algn="r">
-              <a:defRPr sz="1100" b="1">
-                <a:solidFill>
-                  <a:srgbClr val="64748B"/>
+              <a:defRPr sz="1300" b="1">
+                <a:solidFill>
+                  <a:srgbClr val="0284C7"/>
                 </a:solidFill>
                 <a:latin typeface="Segoe UI"/>
               </a:defRPr>
@@ -6487,8 +6790,8 @@
         </p:nvSpPr>
         <p:spPr>
           <a:xfrm>
-            <a:off x="731520" y="6492240"/>
-            <a:ext cx="10728655" cy="274320"/>
+            <a:off x="731520" y="6400800"/>
+            <a:ext cx="10728655" cy="320040"/>
           </a:xfrm>
           <a:prstGeom prst="rect">
             <a:avLst/>
@@ -6502,7 +6805,7 @@
           <a:lstStyle/>
           <a:p>
             <a:pPr>
-              <a:defRPr sz="900">
+              <a:defRPr sz="1050">
                 <a:solidFill>
                   <a:srgbClr val="64748B"/>
                 </a:solidFill>
@@ -6510,14 +6813,59 @@
               </a:defRPr>
             </a:pPr>
             <a:r>
-              <a:t>Campus Connect ERP • Sharad Institute of Technology College of Engineering, Yadrav (SITCOE) • Live PostgreSQL Production System</a:t>
-            </a:r>
+              <a:t>Campus Connect ERP • Sharad Institute of Technology College of Engineering (SITCOE) • Live PostgreSQL Production System</a:t>
+            </a:r>
+          </a:p>
+        </p:txBody>
+      </p:sp>
+      <p:sp>
+        <p:nvSpPr>
+          <p:cNvPr id="6" name="Rectangle 5"/>
+          <p:cNvSpPr/>
+          <p:nvPr/>
+        </p:nvSpPr>
+        <p:spPr>
+          <a:xfrm>
+            <a:off x="731520" y="1508760"/>
+            <a:ext cx="5577840" cy="4053078"/>
+          </a:xfrm>
+          <a:prstGeom prst="rect">
+            <a:avLst/>
+          </a:prstGeom>
+          <a:solidFill>
+            <a:srgbClr val="FFFFFF"/>
+          </a:solidFill>
+          <a:ln w="12700">
+            <a:solidFill>
+              <a:srgbClr val="E2E8F0"/>
+            </a:solidFill>
+          </a:ln>
+        </p:spPr>
+        <p:style>
+          <a:lnRef idx="1">
+            <a:schemeClr val="accent1"/>
+          </a:lnRef>
+          <a:fillRef idx="3">
+            <a:schemeClr val="accent1"/>
+          </a:fillRef>
+          <a:effectRef idx="2">
+            <a:schemeClr val="accent1"/>
+          </a:effectRef>
+          <a:fontRef idx="minor">
+            <a:schemeClr val="lt1"/>
+          </a:fontRef>
+        </p:style>
+        <p:txBody>
+          <a:bodyPr rtlCol="0" anchor="ctr"/>
+          <a:lstStyle/>
+          <a:p>
+            <a:pPr algn="ctr"/>
           </a:p>
         </p:txBody>
       </p:sp>
       <p:pic>
         <p:nvPicPr>
-          <p:cNvPr id="6" name="Picture 5" descr="08_assignments_management.png"/>
+          <p:cNvPr id="7" name="Picture 6" descr="08_assignments_management.png"/>
           <p:cNvPicPr>
             <a:picLocks noChangeAspect="1"/>
           </p:cNvPicPr>
@@ -6531,48 +6879,73 @@
         </p:blipFill>
         <p:spPr>
           <a:xfrm>
-            <a:off x="731520" y="1417320"/>
-            <a:ext cx="5303520" cy="3314700"/>
+            <a:off x="804672" y="1581912"/>
+            <a:ext cx="5431536" cy="3394710"/>
           </a:xfrm>
           <a:prstGeom prst="rect">
             <a:avLst/>
           </a:prstGeom>
         </p:spPr>
       </p:pic>
-      <p:pic>
-        <p:nvPicPr>
-          <p:cNvPr id="7" name="Picture 6" descr="07_notices_bulletin.png"/>
-          <p:cNvPicPr>
-            <a:picLocks noChangeAspect="1"/>
-          </p:cNvPicPr>
+      <p:sp>
+        <p:nvSpPr>
+          <p:cNvPr id="8" name="TextBox 7"/>
+          <p:cNvSpPr txBox="1"/>
           <p:nvPr/>
-        </p:nvPicPr>
-        <p:blipFill>
-          <a:blip r:embed="rId3"/>
-          <a:stretch>
-            <a:fillRect/>
-          </a:stretch>
-        </p:blipFill>
-        <p:spPr>
-          <a:xfrm>
-            <a:off x="731520" y="3886200"/>
-            <a:ext cx="5303520" cy="3314700"/>
+        </p:nvSpPr>
+        <p:spPr>
+          <a:xfrm>
+            <a:off x="822960" y="4976622"/>
+            <a:ext cx="5394960" cy="512064"/>
           </a:xfrm>
           <a:prstGeom prst="rect">
             <a:avLst/>
           </a:prstGeom>
-        </p:spPr>
-      </p:pic>
-      <p:sp>
-        <p:nvSpPr>
-          <p:cNvPr id="8" name="Rectangle 7"/>
+          <a:noFill/>
+        </p:spPr>
+        <p:txBody>
+          <a:bodyPr wrap="square" tIns="36576" bIns="18288" lIns="18288" rIns="18288">
+            <a:spAutoFit/>
+          </a:bodyPr>
+          <a:lstStyle/>
+          <a:p>
+            <a:pPr>
+              <a:defRPr sz="1050" b="1">
+                <a:solidFill>
+                  <a:srgbClr val="0F172A"/>
+                </a:solidFill>
+                <a:latin typeface="Segoe UI"/>
+              </a:defRPr>
+            </a:pPr>
+            <a:r>
+              <a:t>Figure 4: Coursework Assignment Management with submission locking &amp; evaluation queue</a:t>
+            </a:r>
+          </a:p>
+          <a:p>
+            <a:pPr>
+              <a:defRPr sz="950">
+                <a:solidFill>
+                  <a:srgbClr val="0891B2"/>
+                </a:solidFill>
+                <a:latin typeface="Segoe UI"/>
+              </a:defRPr>
+            </a:pPr>
+            <a:r>
+              <a:t>Active Coursework: CS601 'Module 8 Lab Assignment on Concurrency' • 10 pts • 1 Delivered</a:t>
+            </a:r>
+          </a:p>
+        </p:txBody>
+      </p:sp>
+      <p:sp>
+        <p:nvSpPr>
+          <p:cNvPr id="9" name="Rectangle 8"/>
           <p:cNvSpPr/>
           <p:nvPr/>
         </p:nvSpPr>
         <p:spPr>
           <a:xfrm>
-            <a:off x="6263640" y="1417320"/>
-            <a:ext cx="5193792" cy="4892040"/>
+            <a:off x="731520" y="5669280"/>
+            <a:ext cx="5577840" cy="594360"/>
           </a:xfrm>
           <a:prstGeom prst="rect">
             <a:avLst/>
@@ -6601,27 +6974,82 @@
           </a:fontRef>
         </p:style>
         <p:txBody>
-          <a:bodyPr rtlCol="0" anchor="ctr" wrap="square" lIns="274320" rIns="274320" tIns="228600"/>
+          <a:bodyPr rtlCol="0" anchor="ctr" lIns="137160" tIns="73152"/>
+          <a:lstStyle/>
+          <a:p>
+            <a:pPr algn="ctr">
+              <a:defRPr sz="1050">
+                <a:solidFill>
+                  <a:srgbClr val="0F172A"/>
+                </a:solidFill>
+                <a:latin typeface="Segoe UI"/>
+              </a:defRPr>
+            </a:pPr>
+            <a:r>
+              <a:t>📢 Campus Notice Board &amp; Cultural Events: Operates directly with PostgreSQL (zero mock data). Active event: Spring Cultural Fest 'Vibrance 2026'.</a:t>
+            </a:r>
+          </a:p>
+        </p:txBody>
+      </p:sp>
+      <p:sp>
+        <p:nvSpPr>
+          <p:cNvPr id="10" name="Rectangle 9"/>
+          <p:cNvSpPr/>
+          <p:nvPr/>
+        </p:nvSpPr>
+        <p:spPr>
+          <a:xfrm>
+            <a:off x="6583680" y="1508760"/>
+            <a:ext cx="4846320" cy="4754880"/>
+          </a:xfrm>
+          <a:prstGeom prst="rect">
+            <a:avLst/>
+          </a:prstGeom>
+          <a:solidFill>
+            <a:srgbClr val="FFFFFF"/>
+          </a:solidFill>
+          <a:ln w="12700">
+            <a:solidFill>
+              <a:srgbClr val="E2E8F0"/>
+            </a:solidFill>
+          </a:ln>
+        </p:spPr>
+        <p:style>
+          <a:lnRef idx="1">
+            <a:schemeClr val="accent1"/>
+          </a:lnRef>
+          <a:fillRef idx="3">
+            <a:schemeClr val="accent1"/>
+          </a:fillRef>
+          <a:effectRef idx="2">
+            <a:schemeClr val="accent1"/>
+          </a:effectRef>
+          <a:fontRef idx="minor">
+            <a:schemeClr val="lt1"/>
+          </a:fontRef>
+        </p:style>
+        <p:txBody>
+          <a:bodyPr rtlCol="0" anchor="ctr" wrap="square" lIns="274320" rIns="274320" tIns="201168"/>
           <a:lstStyle/>
           <a:p>
             <a:pPr algn="ctr">
               <a:spcAft>
-                <a:spcPts val="1200"/>
+                <a:spcPts val="1400"/>
               </a:spcAft>
               <a:defRPr sz="1300" b="1">
                 <a:solidFill>
-                  <a:srgbClr val="D97706"/>
-                </a:solidFill>
-                <a:latin typeface="Segoe UI"/>
-              </a:defRPr>
-            </a:pPr>
-            <a:r>
-              <a:t>📢 CAMPUS COMMUNICATION &amp; COURSEWORK</a:t>
-            </a:r>
-          </a:p>
-          <a:p>
-            <a:pPr>
-              <a:defRPr sz="1050" b="1">
+                  <a:srgbClr val="0284C7"/>
+                </a:solidFill>
+                <a:latin typeface="Segoe UI"/>
+              </a:defRPr>
+            </a:pPr>
+            <a:r>
+              <a:t>📁 VERIFIED COLLABORATION &amp; CAMPUS SERVICES</a:t>
+            </a:r>
+          </a:p>
+          <a:p>
+            <a:pPr>
+              <a:defRPr sz="1500" b="1">
                 <a:solidFill>
                   <a:srgbClr val="0F172A"/>
                 </a:solidFill>
@@ -6629,17 +7057,17 @@
               </a:defRPr>
             </a:pPr>
             <a:r>
-              <a:t>✔ Coursework &amp; Assignment Management</a:t>
+              <a:t>✔ Coursework Assignment Publishing</a:t>
             </a:r>
           </a:p>
           <a:p>
             <a:pPr>
               <a:spcAft>
-                <a:spcPts val="800"/>
+                <a:spcPts val="1000"/>
               </a:spcAft>
-              <a:defRPr sz="950">
-                <a:solidFill>
-                  <a:srgbClr val="64748B"/>
+              <a:defRPr sz="1200">
+                <a:solidFill>
+                  <a:srgbClr val="334155"/>
                 </a:solidFill>
                 <a:latin typeface="Segoe UI"/>
               </a:defRPr>
@@ -6650,7 +7078,7 @@
           </a:p>
           <a:p>
             <a:pPr>
-              <a:defRPr sz="1050" b="1">
+              <a:defRPr sz="1500" b="1">
                 <a:solidFill>
                   <a:srgbClr val="0F172A"/>
                 </a:solidFill>
@@ -6658,17 +7086,17 @@
               </a:defRPr>
             </a:pPr>
             <a:r>
-              <a:t>✔ Student Submission &amp; Tamper-Proof Locking</a:t>
+              <a:t>✔ Tamper-Proof Submission Locking</a:t>
             </a:r>
           </a:p>
           <a:p>
             <a:pPr>
               <a:spcAft>
-                <a:spcPts val="800"/>
+                <a:spcPts val="1000"/>
               </a:spcAft>
-              <a:defRPr sz="950">
-                <a:solidFill>
-                  <a:srgbClr val="64748B"/>
+              <a:defRPr sz="1200">
+                <a:solidFill>
+                  <a:srgbClr val="334155"/>
                 </a:solidFill>
                 <a:latin typeface="Segoe UI"/>
               </a:defRPr>
@@ -6679,7 +7107,7 @@
           </a:p>
           <a:p>
             <a:pPr>
-              <a:defRPr sz="1050" b="1">
+              <a:defRPr sz="1500" b="1">
                 <a:solidFill>
                   <a:srgbClr val="0F172A"/>
                 </a:solidFill>
@@ -6687,28 +7115,28 @@
               </a:defRPr>
             </a:pPr>
             <a:r>
-              <a:t>✔ Faculty Evaluation &amp; Grading Queue</a:t>
+              <a:t>✔ Faculty Evaluation Queue</a:t>
             </a:r>
           </a:p>
           <a:p>
             <a:pPr>
               <a:spcAft>
-                <a:spcPts val="800"/>
+                <a:spcPts val="1000"/>
               </a:spcAft>
-              <a:defRPr sz="950">
-                <a:solidFill>
-                  <a:srgbClr val="64748B"/>
-                </a:solidFill>
-                <a:latin typeface="Segoe UI"/>
-              </a:defRPr>
-            </a:pPr>
-            <a:r>
-              <a:t>  Real-time submission ledger displays delivered coursework (1 Completed, 1 Awaiting Review), providing instructors with direct review and grading interfaces.</a:t>
-            </a:r>
-          </a:p>
-          <a:p>
-            <a:pPr>
-              <a:defRPr sz="1050" b="1">
+              <a:defRPr sz="1200">
+                <a:solidFill>
+                  <a:srgbClr val="334155"/>
+                </a:solidFill>
+                <a:latin typeface="Segoe UI"/>
+              </a:defRPr>
+            </a:pPr>
+            <a:r>
+              <a:t>  Real-time coursework ledger displays delivered submissions (1 Completed, 1 Awaiting Evaluation), providing instructors with direct review and grading interfaces.</a:t>
+            </a:r>
+          </a:p>
+          <a:p>
+            <a:pPr>
+              <a:defRPr sz="1500" b="1">
                 <a:solidFill>
                   <a:srgbClr val="0F172A"/>
                 </a:solidFill>
@@ -6722,46 +7150,17 @@
           <a:p>
             <a:pPr>
               <a:spcAft>
-                <a:spcPts val="800"/>
+                <a:spcPts val="1000"/>
               </a:spcAft>
-              <a:defRPr sz="950">
-                <a:solidFill>
-                  <a:srgbClr val="64748B"/>
-                </a:solidFill>
-                <a:latin typeface="Segoe UI"/>
-              </a:defRPr>
-            </a:pPr>
-            <a:r>
-              <a:t>  The notice board operates directly against the PostgreSQL database with zero placeholder fallbacks. Handles official announcements across Academic, Examination, and Cultural categories.</a:t>
-            </a:r>
-          </a:p>
-          <a:p>
-            <a:pPr>
-              <a:defRPr sz="1050" b="1">
-                <a:solidFill>
-                  <a:srgbClr val="0F172A"/>
-                </a:solidFill>
-                <a:latin typeface="Segoe UI"/>
-              </a:defRPr>
-            </a:pPr>
-            <a:r>
-              <a:t>✔ Campus Events Coordination</a:t>
-            </a:r>
-          </a:p>
-          <a:p>
-            <a:pPr>
-              <a:spcAft>
-                <a:spcPts val="800"/>
-              </a:spcAft>
-              <a:defRPr sz="950">
-                <a:solidFill>
-                  <a:srgbClr val="64748B"/>
-                </a:solidFill>
-                <a:latin typeface="Segoe UI"/>
-              </a:defRPr>
-            </a:pPr>
-            <a:r>
-              <a:t>  Dynamic event tracking for inter-collegiate and departmental fests (e.g. 'Spring Cultural Fest Vibrance 2026' at Open Air Amphitheatre).</a:t>
+              <a:defRPr sz="1200">
+                <a:solidFill>
+                  <a:srgbClr val="334155"/>
+                </a:solidFill>
+                <a:latin typeface="Segoe UI"/>
+              </a:defRPr>
+            </a:pPr>
+            <a:r>
+              <a:t>  The campus notice board operates directly against the PostgreSQL database with zero placeholder fallbacks. Handles official announcements across Academic, Examination, and Cultural categories.</a:t>
             </a:r>
           </a:p>
         </p:txBody>
@@ -6799,7 +7198,7 @@
             <a:avLst/>
           </a:prstGeom>
           <a:solidFill>
-            <a:srgbClr val="F8FAFC"/>
+            <a:srgbClr val="0F172A"/>
           </a:solidFill>
           <a:ln>
             <a:noFill/>
@@ -6835,19 +7234,17 @@
         </p:nvSpPr>
         <p:spPr>
           <a:xfrm>
-            <a:off x="731520" y="365760"/>
-            <a:ext cx="10728655" cy="868680"/>
+            <a:off x="0" y="0"/>
+            <a:ext cx="12191695" cy="109728"/>
           </a:xfrm>
           <a:prstGeom prst="rect">
             <a:avLst/>
           </a:prstGeom>
           <a:solidFill>
-            <a:srgbClr val="FFFFFF"/>
+            <a:srgbClr val="06B6D4"/>
           </a:solidFill>
-          <a:ln w="12700">
-            <a:solidFill>
-              <a:srgbClr val="E2E8F0"/>
-            </a:solidFill>
+          <a:ln>
+            <a:noFill/>
           </a:ln>
         </p:spPr>
         <p:style>
@@ -6865,472 +7262,29 @@
           </a:fontRef>
         </p:style>
         <p:txBody>
-          <a:bodyPr rtlCol="0" anchor="ctr" wrap="square" lIns="228600" tIns="109728" rIns="228600"/>
-          <a:lstStyle/>
-          <a:p>
-            <a:pPr algn="ctr">
-              <a:defRPr sz="950" b="1">
-                <a:solidFill>
-                  <a:srgbClr val="2563EB"/>
-                </a:solidFill>
-                <a:latin typeface="Segoe UI"/>
-              </a:defRPr>
-            </a:pPr>
-            <a:r>
-              <a:t>PROJECT WRAP-UP</a:t>
-            </a:r>
-          </a:p>
-          <a:p>
-            <a:pPr>
-              <a:defRPr sz="1800" b="1">
-                <a:solidFill>
-                  <a:srgbClr val="0F172A"/>
-                </a:solidFill>
-                <a:latin typeface="Segoe UI"/>
-              </a:defRPr>
-            </a:pPr>
-            <a:r>
-              <a:t>Project Conclusion, Impact &amp; Future Roadmap</a:t>
-            </a:r>
-          </a:p>
-        </p:txBody>
-      </p:sp>
-      <p:sp>
-        <p:nvSpPr>
-          <p:cNvPr id="4" name="TextBox 3"/>
-          <p:cNvSpPr txBox="1"/>
-          <p:nvPr/>
-        </p:nvSpPr>
-        <p:spPr>
-          <a:xfrm>
-            <a:off x="9601200" y="502920"/>
-            <a:ext cx="1645920" cy="365760"/>
-          </a:xfrm>
-          <a:prstGeom prst="rect">
-            <a:avLst/>
-          </a:prstGeom>
-          <a:noFill/>
-        </p:spPr>
-        <p:txBody>
-          <a:bodyPr wrap="none">
-            <a:spAutoFit/>
-          </a:bodyPr>
-          <a:lstStyle/>
-          <a:p>
-            <a:pPr algn="r">
-              <a:defRPr sz="1100" b="1">
-                <a:solidFill>
-                  <a:srgbClr val="64748B"/>
-                </a:solidFill>
-                <a:latin typeface="Segoe UI"/>
-              </a:defRPr>
-            </a:pPr>
-            <a:r>
-              <a:t>Slide 7 of 7</a:t>
-            </a:r>
-          </a:p>
-        </p:txBody>
-      </p:sp>
-      <p:sp>
-        <p:nvSpPr>
-          <p:cNvPr id="5" name="TextBox 4"/>
-          <p:cNvSpPr txBox="1"/>
-          <p:nvPr/>
-        </p:nvSpPr>
-        <p:spPr>
-          <a:xfrm>
-            <a:off x="731520" y="6492240"/>
-            <a:ext cx="10728655" cy="274320"/>
-          </a:xfrm>
-          <a:prstGeom prst="rect">
-            <a:avLst/>
-          </a:prstGeom>
-          <a:noFill/>
-        </p:spPr>
-        <p:txBody>
-          <a:bodyPr wrap="none">
-            <a:spAutoFit/>
-          </a:bodyPr>
-          <a:lstStyle/>
-          <a:p>
-            <a:pPr>
-              <a:defRPr sz="900">
-                <a:solidFill>
-                  <a:srgbClr val="64748B"/>
-                </a:solidFill>
-                <a:latin typeface="Segoe UI"/>
-              </a:defRPr>
-            </a:pPr>
-            <a:r>
-              <a:t>Campus Connect ERP • Sharad Institute of Technology College of Engineering, Yadrav (SITCOE) • Live PostgreSQL Production System</a:t>
-            </a:r>
-          </a:p>
-        </p:txBody>
-      </p:sp>
-      <p:sp>
-        <p:nvSpPr>
-          <p:cNvPr id="6" name="Rectangle 5"/>
+          <a:bodyPr rtlCol="0" anchor="ctr"/>
+          <a:lstStyle/>
+          <a:p>
+            <a:pPr algn="ctr"/>
+          </a:p>
+        </p:txBody>
+      </p:sp>
+      <p:sp>
+        <p:nvSpPr>
+          <p:cNvPr id="4" name="Rectangle 3"/>
           <p:cNvSpPr/>
           <p:nvPr/>
         </p:nvSpPr>
         <p:spPr>
           <a:xfrm>
-            <a:off x="731520" y="1417320"/>
-            <a:ext cx="5212080" cy="3977639"/>
+            <a:off x="731520" y="365760"/>
+            <a:ext cx="10728655" cy="1005840"/>
           </a:xfrm>
           <a:prstGeom prst="rect">
             <a:avLst/>
           </a:prstGeom>
           <a:solidFill>
-            <a:srgbClr val="FFFFFF"/>
-          </a:solidFill>
-          <a:ln w="12700">
-            <a:solidFill>
-              <a:srgbClr val="E2E8F0"/>
-            </a:solidFill>
-          </a:ln>
-        </p:spPr>
-        <p:style>
-          <a:lnRef idx="1">
-            <a:schemeClr val="accent1"/>
-          </a:lnRef>
-          <a:fillRef idx="3">
-            <a:schemeClr val="accent1"/>
-          </a:fillRef>
-          <a:effectRef idx="2">
-            <a:schemeClr val="accent1"/>
-          </a:effectRef>
-          <a:fontRef idx="minor">
-            <a:schemeClr val="lt1"/>
-          </a:fontRef>
-        </p:style>
-        <p:txBody>
-          <a:bodyPr rtlCol="0" anchor="ctr" wrap="square" lIns="274320" rIns="274320" tIns="201168"/>
-          <a:lstStyle/>
-          <a:p>
-            <a:pPr algn="ctr">
-              <a:spcAft>
-                <a:spcPts val="1000"/>
-              </a:spcAft>
-              <a:defRPr sz="1300" b="1">
-                <a:solidFill>
-                  <a:srgbClr val="10B981"/>
-                </a:solidFill>
-                <a:latin typeface="Segoe UI"/>
-              </a:defRPr>
-            </a:pPr>
-            <a:r>
-              <a:t>🏁 VERIFIED CAPABILITIES &amp; ACHIEVEMENTS</a:t>
-            </a:r>
-          </a:p>
-          <a:p>
-            <a:pPr>
-              <a:defRPr sz="1050" b="1">
-                <a:solidFill>
-                  <a:srgbClr val="0F172A"/>
-                </a:solidFill>
-                <a:latin typeface="Segoe UI"/>
-              </a:defRPr>
-            </a:pPr>
-            <a:r>
-              <a:t>✔ Fully Operational Enterprise System</a:t>
-            </a:r>
-          </a:p>
-          <a:p>
-            <a:pPr>
-              <a:spcAft>
-                <a:spcPts val="600"/>
-              </a:spcAft>
-              <a:defRPr sz="950">
-                <a:solidFill>
-                  <a:srgbClr val="64748B"/>
-                </a:solidFill>
-                <a:latin typeface="Segoe UI"/>
-              </a:defRPr>
-            </a:pPr>
-            <a:r>
-              <a:t>  Successfully delivered a complete, working ERP system for Sharad Institute of Technology College of Engineering (SITCOE), verified on live PostgreSQL cloud storage.</a:t>
-            </a:r>
-          </a:p>
-          <a:p>
-            <a:pPr>
-              <a:defRPr sz="1050" b="1">
-                <a:solidFill>
-                  <a:srgbClr val="0F172A"/>
-                </a:solidFill>
-                <a:latin typeface="Segoe UI"/>
-              </a:defRPr>
-            </a:pPr>
-            <a:r>
-              <a:t>✔ Comprehensive Academic Lifecycle</a:t>
-            </a:r>
-          </a:p>
-          <a:p>
-            <a:pPr>
-              <a:spcAft>
-                <a:spcPts val="600"/>
-              </a:spcAft>
-              <a:defRPr sz="950">
-                <a:solidFill>
-                  <a:srgbClr val="64748B"/>
-                </a:solidFill>
-                <a:latin typeface="Segoe UI"/>
-              </a:defRPr>
-            </a:pPr>
-            <a:r>
-              <a:t>  Unified attendance roll-call tracking, 4-tier continuous assessment (CA1, CA2, Mid-Sem, End-Sem), and official published grade cards within a single platform.</a:t>
-            </a:r>
-          </a:p>
-          <a:p>
-            <a:pPr>
-              <a:defRPr sz="1050" b="1">
-                <a:solidFill>
-                  <a:srgbClr val="0F172A"/>
-                </a:solidFill>
-                <a:latin typeface="Segoe UI"/>
-              </a:defRPr>
-            </a:pPr>
-            <a:r>
-              <a:t>✔ Zero Demo/Mock Fallbacks</a:t>
-            </a:r>
-          </a:p>
-          <a:p>
-            <a:pPr>
-              <a:spcAft>
-                <a:spcPts val="600"/>
-              </a:spcAft>
-              <a:defRPr sz="950">
-                <a:solidFill>
-                  <a:srgbClr val="64748B"/>
-                </a:solidFill>
-                <a:latin typeface="Segoe UI"/>
-              </a:defRPr>
-            </a:pPr>
-            <a:r>
-              <a:t>  Strict data integrity across all modules—every view directly binds to genuine database tables with authentic empty states.</a:t>
-            </a:r>
-          </a:p>
-          <a:p>
-            <a:pPr>
-              <a:defRPr sz="1050" b="1">
-                <a:solidFill>
-                  <a:srgbClr val="0F172A"/>
-                </a:solidFill>
-                <a:latin typeface="Segoe UI"/>
-              </a:defRPr>
-            </a:pPr>
-            <a:r>
-              <a:t>✔ Multi-Role Security &amp; Isolation</a:t>
-            </a:r>
-          </a:p>
-          <a:p>
-            <a:pPr>
-              <a:spcAft>
-                <a:spcPts val="600"/>
-              </a:spcAft>
-              <a:defRPr sz="950">
-                <a:solidFill>
-                  <a:srgbClr val="64748B"/>
-                </a:solidFill>
-                <a:latin typeface="Segoe UI"/>
-              </a:defRPr>
-            </a:pPr>
-            <a:r>
-              <a:t>  Robust Role-Based Access Control (RBAC) with token session isolation, preventing multi-tab session conflicts between Admin, Faculty, and Student users.</a:t>
-            </a:r>
-          </a:p>
-        </p:txBody>
-      </p:sp>
-      <p:sp>
-        <p:nvSpPr>
-          <p:cNvPr id="7" name="Rectangle 6"/>
-          <p:cNvSpPr/>
-          <p:nvPr/>
-        </p:nvSpPr>
-        <p:spPr>
-          <a:xfrm>
-            <a:off x="6217920" y="1417320"/>
-            <a:ext cx="5212080" cy="3977639"/>
-          </a:xfrm>
-          <a:prstGeom prst="rect">
-            <a:avLst/>
-          </a:prstGeom>
-          <a:solidFill>
-            <a:srgbClr val="FFFFFF"/>
-          </a:solidFill>
-          <a:ln w="12700">
-            <a:solidFill>
-              <a:srgbClr val="E2E8F0"/>
-            </a:solidFill>
-          </a:ln>
-        </p:spPr>
-        <p:style>
-          <a:lnRef idx="1">
-            <a:schemeClr val="accent1"/>
-          </a:lnRef>
-          <a:fillRef idx="3">
-            <a:schemeClr val="accent1"/>
-          </a:fillRef>
-          <a:effectRef idx="2">
-            <a:schemeClr val="accent1"/>
-          </a:effectRef>
-          <a:fontRef idx="minor">
-            <a:schemeClr val="lt1"/>
-          </a:fontRef>
-        </p:style>
-        <p:txBody>
-          <a:bodyPr rtlCol="0" anchor="ctr" wrap="square" lIns="274320" rIns="274320" tIns="201168"/>
-          <a:lstStyle/>
-          <a:p>
-            <a:pPr algn="ctr">
-              <a:spcAft>
-                <a:spcPts val="1000"/>
-              </a:spcAft>
-              <a:defRPr sz="1300" b="1">
-                <a:solidFill>
-                  <a:srgbClr val="2563EB"/>
-                </a:solidFill>
-                <a:latin typeface="Segoe UI"/>
-              </a:defRPr>
-            </a:pPr>
-            <a:r>
-              <a:t>🚀 FUTURE ROADMAP &amp; PLANNED ENHANCEMENTS</a:t>
-            </a:r>
-          </a:p>
-          <a:p>
-            <a:pPr>
-              <a:defRPr sz="1050" b="1">
-                <a:solidFill>
-                  <a:srgbClr val="0F172A"/>
-                </a:solidFill>
-                <a:latin typeface="Segoe UI"/>
-              </a:defRPr>
-            </a:pPr>
-            <a:r>
-              <a:t>★ Automated SMS Shortage Alerts (Planned)</a:t>
-            </a:r>
-          </a:p>
-          <a:p>
-            <a:pPr>
-              <a:spcAft>
-                <a:spcPts val="600"/>
-              </a:spcAft>
-              <a:defRPr sz="950">
-                <a:solidFill>
-                  <a:srgbClr val="64748B"/>
-                </a:solidFill>
-                <a:latin typeface="Segoe UI"/>
-              </a:defRPr>
-            </a:pPr>
-            <a:r>
-              <a:t>  Integrate SMS gateways (Twilio / Fast2SMS) to automatically alert parents and students when overall attendance falls below the mandatory 75% threshold.</a:t>
-            </a:r>
-          </a:p>
-          <a:p>
-            <a:pPr>
-              <a:defRPr sz="1050" b="1">
-                <a:solidFill>
-                  <a:srgbClr val="0F172A"/>
-                </a:solidFill>
-                <a:latin typeface="Segoe UI"/>
-              </a:defRPr>
-            </a:pPr>
-            <a:r>
-              <a:t>★ Web Push Notifications (Planned)</a:t>
-            </a:r>
-          </a:p>
-          <a:p>
-            <a:pPr>
-              <a:spcAft>
-                <a:spcPts val="600"/>
-              </a:spcAft>
-              <a:defRPr sz="950">
-                <a:solidFill>
-                  <a:srgbClr val="64748B"/>
-                </a:solidFill>
-                <a:latin typeface="Segoe UI"/>
-              </a:defRPr>
-            </a:pPr>
-            <a:r>
-              <a:t>  Implement Service Worker push notifications for urgent circulars, impending assignment deadlines, and newly published examination grade cards.</a:t>
-            </a:r>
-          </a:p>
-          <a:p>
-            <a:pPr>
-              <a:defRPr sz="1050" b="1">
-                <a:solidFill>
-                  <a:srgbClr val="0F172A"/>
-                </a:solidFill>
-                <a:latin typeface="Segoe UI"/>
-              </a:defRPr>
-            </a:pPr>
-            <a:r>
-              <a:t>★ Advanced Academic Analytics &amp; NIRF Reporting (Planned)</a:t>
-            </a:r>
-          </a:p>
-          <a:p>
-            <a:pPr>
-              <a:spcAft>
-                <a:spcPts val="600"/>
-              </a:spcAft>
-              <a:defRPr sz="950">
-                <a:solidFill>
-                  <a:srgbClr val="64748B"/>
-                </a:solidFill>
-                <a:latin typeface="Segoe UI"/>
-              </a:defRPr>
-            </a:pPr>
-            <a:r>
-              <a:t>  Build graphical department-wise analytics, batch pass-rate distributions, and automated CSV/PDF report generators for NIRF and NAAC accreditation.</a:t>
-            </a:r>
-          </a:p>
-          <a:p>
-            <a:pPr>
-              <a:defRPr sz="1050" b="1">
-                <a:solidFill>
-                  <a:srgbClr val="0F172A"/>
-                </a:solidFill>
-                <a:latin typeface="Segoe UI"/>
-              </a:defRPr>
-            </a:pPr>
-            <a:r>
-              <a:t>★ Native Mobile Companion Application (Planned)</a:t>
-            </a:r>
-          </a:p>
-          <a:p>
-            <a:pPr>
-              <a:spcAft>
-                <a:spcPts val="600"/>
-              </a:spcAft>
-              <a:defRPr sz="950">
-                <a:solidFill>
-                  <a:srgbClr val="64748B"/>
-                </a:solidFill>
-                <a:latin typeface="Segoe UI"/>
-              </a:defRPr>
-            </a:pPr>
-            <a:r>
-              <a:t>  Develop a Flutter/React Native mobile client utilizing the existing secure REST API endpoints for convenient student access on Android and iOS devices.</a:t>
-            </a:r>
-          </a:p>
-        </p:txBody>
-      </p:sp>
-      <p:sp>
-        <p:nvSpPr>
-          <p:cNvPr id="8" name="Rectangle 7"/>
-          <p:cNvSpPr/>
-          <p:nvPr/>
-        </p:nvSpPr>
-        <p:spPr>
-          <a:xfrm>
-            <a:off x="731520" y="5532120"/>
-            <a:ext cx="10698480" cy="822960"/>
-          </a:xfrm>
-          <a:prstGeom prst="rect">
-            <a:avLst/>
-          </a:prstGeom>
-          <a:solidFill>
-            <a:srgbClr val="0F172A"/>
+            <a:srgbClr val="1E293B"/>
           </a:solidFill>
           <a:ln w="12700">
             <a:solidFill>
@@ -7353,6 +7307,494 @@
           </a:fontRef>
         </p:style>
         <p:txBody>
+          <a:bodyPr rtlCol="0" anchor="ctr" wrap="square" lIns="228600" tIns="109728" rIns="228600"/>
+          <a:lstStyle/>
+          <a:p>
+            <a:pPr algn="ctr">
+              <a:defRPr sz="1100" b="1">
+                <a:solidFill>
+                  <a:srgbClr val="06B6D4"/>
+                </a:solidFill>
+                <a:latin typeface="Segoe UI"/>
+              </a:defRPr>
+            </a:pPr>
+            <a:r>
+              <a:t>PROJECT SYNTHESIS &amp; VIVA SUMMARY</a:t>
+            </a:r>
+          </a:p>
+          <a:p>
+            <a:pPr>
+              <a:defRPr sz="2800" b="1">
+                <a:solidFill>
+                  <a:srgbClr val="FFFFFF"/>
+                </a:solidFill>
+                <a:latin typeface="Segoe UI"/>
+              </a:defRPr>
+            </a:pPr>
+            <a:r>
+              <a:t>Project Conclusion, Impact &amp; Future Roadmap</a:t>
+            </a:r>
+          </a:p>
+        </p:txBody>
+      </p:sp>
+      <p:sp>
+        <p:nvSpPr>
+          <p:cNvPr id="5" name="TextBox 4"/>
+          <p:cNvSpPr txBox="1"/>
+          <p:nvPr/>
+        </p:nvSpPr>
+        <p:spPr>
+          <a:xfrm>
+            <a:off x="9601200" y="502920"/>
+            <a:ext cx="1645920" cy="411480"/>
+          </a:xfrm>
+          <a:prstGeom prst="rect">
+            <a:avLst/>
+          </a:prstGeom>
+          <a:noFill/>
+        </p:spPr>
+        <p:txBody>
+          <a:bodyPr wrap="none">
+            <a:spAutoFit/>
+          </a:bodyPr>
+          <a:lstStyle/>
+          <a:p>
+            <a:pPr algn="r">
+              <a:defRPr sz="1300" b="1">
+                <a:solidFill>
+                  <a:srgbClr val="06B6D4"/>
+                </a:solidFill>
+                <a:latin typeface="Segoe UI"/>
+              </a:defRPr>
+            </a:pPr>
+            <a:r>
+              <a:t>Slide 7 of 7</a:t>
+            </a:r>
+          </a:p>
+        </p:txBody>
+      </p:sp>
+      <p:sp>
+        <p:nvSpPr>
+          <p:cNvPr id="6" name="TextBox 5"/>
+          <p:cNvSpPr txBox="1"/>
+          <p:nvPr/>
+        </p:nvSpPr>
+        <p:spPr>
+          <a:xfrm>
+            <a:off x="731520" y="6400800"/>
+            <a:ext cx="10728655" cy="320040"/>
+          </a:xfrm>
+          <a:prstGeom prst="rect">
+            <a:avLst/>
+          </a:prstGeom>
+          <a:noFill/>
+        </p:spPr>
+        <p:txBody>
+          <a:bodyPr wrap="none">
+            <a:spAutoFit/>
+          </a:bodyPr>
+          <a:lstStyle/>
+          <a:p>
+            <a:pPr>
+              <a:defRPr sz="1050">
+                <a:solidFill>
+                  <a:srgbClr val="94A3B8"/>
+                </a:solidFill>
+                <a:latin typeface="Segoe UI"/>
+              </a:defRPr>
+            </a:pPr>
+            <a:r>
+              <a:t>Campus Connect ERP • Sharad Institute of Technology College of Engineering (SITCOE) • Live PostgreSQL Production System</a:t>
+            </a:r>
+          </a:p>
+        </p:txBody>
+      </p:sp>
+      <p:sp>
+        <p:nvSpPr>
+          <p:cNvPr id="7" name="Rectangle 6"/>
+          <p:cNvSpPr/>
+          <p:nvPr/>
+        </p:nvSpPr>
+        <p:spPr>
+          <a:xfrm>
+            <a:off x="731520" y="1508760"/>
+            <a:ext cx="5212080" cy="3886200"/>
+          </a:xfrm>
+          <a:prstGeom prst="rect">
+            <a:avLst/>
+          </a:prstGeom>
+          <a:solidFill>
+            <a:srgbClr val="1E293B"/>
+          </a:solidFill>
+          <a:ln w="19050">
+            <a:solidFill>
+              <a:srgbClr val="0891B2"/>
+            </a:solidFill>
+          </a:ln>
+        </p:spPr>
+        <p:style>
+          <a:lnRef idx="1">
+            <a:schemeClr val="accent1"/>
+          </a:lnRef>
+          <a:fillRef idx="3">
+            <a:schemeClr val="accent1"/>
+          </a:fillRef>
+          <a:effectRef idx="2">
+            <a:schemeClr val="accent1"/>
+          </a:effectRef>
+          <a:fontRef idx="minor">
+            <a:schemeClr val="lt1"/>
+          </a:fontRef>
+        </p:style>
+        <p:txBody>
+          <a:bodyPr rtlCol="0" anchor="ctr" wrap="square" lIns="274320" rIns="274320" tIns="201168"/>
+          <a:lstStyle/>
+          <a:p>
+            <a:pPr algn="ctr">
+              <a:spcAft>
+                <a:spcPts val="1200"/>
+              </a:spcAft>
+              <a:defRPr sz="1300" b="1">
+                <a:solidFill>
+                  <a:srgbClr val="06B6D4"/>
+                </a:solidFill>
+                <a:latin typeface="Segoe UI"/>
+              </a:defRPr>
+            </a:pPr>
+            <a:r>
+              <a:t>🏁 VERIFIED CAPABILITIES &amp; PRACTICAL VALUE</a:t>
+            </a:r>
+          </a:p>
+          <a:p>
+            <a:pPr>
+              <a:defRPr sz="1500" b="1">
+                <a:solidFill>
+                  <a:srgbClr val="FFFFFF"/>
+                </a:solidFill>
+                <a:latin typeface="Segoe UI"/>
+              </a:defRPr>
+            </a:pPr>
+            <a:r>
+              <a:t>✔ Fully Operational Enterprise System</a:t>
+            </a:r>
+          </a:p>
+          <a:p>
+            <a:pPr>
+              <a:spcAft>
+                <a:spcPts val="800"/>
+              </a:spcAft>
+              <a:defRPr sz="1200">
+                <a:solidFill>
+                  <a:srgbClr val="94A3B8"/>
+                </a:solidFill>
+                <a:latin typeface="Segoe UI"/>
+              </a:defRPr>
+            </a:pPr>
+            <a:r>
+              <a:t>  Successfully delivered a working college ERP for SITCOE, verified on live PostgreSQL cloud storage with complete schema referential integrity.</a:t>
+            </a:r>
+          </a:p>
+          <a:p>
+            <a:pPr>
+              <a:defRPr sz="1500" b="1">
+                <a:solidFill>
+                  <a:srgbClr val="FFFFFF"/>
+                </a:solidFill>
+                <a:latin typeface="Segoe UI"/>
+              </a:defRPr>
+            </a:pPr>
+            <a:r>
+              <a:t>✔ End-to-End Academic Digitization</a:t>
+            </a:r>
+          </a:p>
+          <a:p>
+            <a:pPr>
+              <a:spcAft>
+                <a:spcPts val="800"/>
+              </a:spcAft>
+              <a:defRPr sz="1200">
+                <a:solidFill>
+                  <a:srgbClr val="94A3B8"/>
+                </a:solidFill>
+                <a:latin typeface="Segoe UI"/>
+              </a:defRPr>
+            </a:pPr>
+            <a:r>
+              <a:t>  Unified attendance roll-call tracking, 4-tier continuous assessment (CA1, CA2, Mid-Sem, End-Sem), and official published grade cards within a single platform.</a:t>
+            </a:r>
+          </a:p>
+          <a:p>
+            <a:pPr>
+              <a:defRPr sz="1500" b="1">
+                <a:solidFill>
+                  <a:srgbClr val="FFFFFF"/>
+                </a:solidFill>
+                <a:latin typeface="Segoe UI"/>
+              </a:defRPr>
+            </a:pPr>
+            <a:r>
+              <a:t>✔ Zero Demo/Mock Fallbacks</a:t>
+            </a:r>
+          </a:p>
+          <a:p>
+            <a:pPr>
+              <a:spcAft>
+                <a:spcPts val="800"/>
+              </a:spcAft>
+              <a:defRPr sz="1200">
+                <a:solidFill>
+                  <a:srgbClr val="94A3B8"/>
+                </a:solidFill>
+                <a:latin typeface="Segoe UI"/>
+              </a:defRPr>
+            </a:pPr>
+            <a:r>
+              <a:t>  Strict data integrity across all modules—every view directly queries authentic database tables with legitimate empty states.</a:t>
+            </a:r>
+          </a:p>
+          <a:p>
+            <a:pPr>
+              <a:defRPr sz="1500" b="1">
+                <a:solidFill>
+                  <a:srgbClr val="FFFFFF"/>
+                </a:solidFill>
+                <a:latin typeface="Segoe UI"/>
+              </a:defRPr>
+            </a:pPr>
+            <a:r>
+              <a:t>✔ Multi-Role Security &amp; Isolation</a:t>
+            </a:r>
+          </a:p>
+          <a:p>
+            <a:pPr>
+              <a:spcAft>
+                <a:spcPts val="800"/>
+              </a:spcAft>
+              <a:defRPr sz="1200">
+                <a:solidFill>
+                  <a:srgbClr val="94A3B8"/>
+                </a:solidFill>
+                <a:latin typeface="Segoe UI"/>
+              </a:defRPr>
+            </a:pPr>
+            <a:r>
+              <a:t>  Robust Role-Based Access Control (RBAC) with token session isolation, preventing multi-tab session conflicts between Admin, Faculty, and Student workspaces.</a:t>
+            </a:r>
+          </a:p>
+        </p:txBody>
+      </p:sp>
+      <p:sp>
+        <p:nvSpPr>
+          <p:cNvPr id="8" name="Rectangle 7"/>
+          <p:cNvSpPr/>
+          <p:nvPr/>
+        </p:nvSpPr>
+        <p:spPr>
+          <a:xfrm>
+            <a:off x="6217920" y="1508760"/>
+            <a:ext cx="5212080" cy="3886200"/>
+          </a:xfrm>
+          <a:prstGeom prst="rect">
+            <a:avLst/>
+          </a:prstGeom>
+          <a:solidFill>
+            <a:srgbClr val="1E293B"/>
+          </a:solidFill>
+          <a:ln w="19050">
+            <a:solidFill>
+              <a:srgbClr val="334155"/>
+            </a:solidFill>
+          </a:ln>
+        </p:spPr>
+        <p:style>
+          <a:lnRef idx="1">
+            <a:schemeClr val="accent1"/>
+          </a:lnRef>
+          <a:fillRef idx="3">
+            <a:schemeClr val="accent1"/>
+          </a:fillRef>
+          <a:effectRef idx="2">
+            <a:schemeClr val="accent1"/>
+          </a:effectRef>
+          <a:fontRef idx="minor">
+            <a:schemeClr val="lt1"/>
+          </a:fontRef>
+        </p:style>
+        <p:txBody>
+          <a:bodyPr rtlCol="0" anchor="ctr" wrap="square" lIns="274320" rIns="274320" tIns="201168"/>
+          <a:lstStyle/>
+          <a:p>
+            <a:pPr algn="ctr">
+              <a:spcAft>
+                <a:spcPts val="1200"/>
+              </a:spcAft>
+              <a:defRPr sz="1300" b="1">
+                <a:solidFill>
+                  <a:srgbClr val="10B981"/>
+                </a:solidFill>
+                <a:latin typeface="Segoe UI"/>
+              </a:defRPr>
+            </a:pPr>
+            <a:r>
+              <a:t>🚀 FUTURE ROADMAP &amp; PLANNED ENHANCEMENTS</a:t>
+            </a:r>
+          </a:p>
+          <a:p>
+            <a:pPr>
+              <a:defRPr sz="1500" b="1">
+                <a:solidFill>
+                  <a:srgbClr val="FFFFFF"/>
+                </a:solidFill>
+                <a:latin typeface="Segoe UI"/>
+              </a:defRPr>
+            </a:pPr>
+            <a:r>
+              <a:t>★ Automated Parent SMS Alerts (Planned)</a:t>
+            </a:r>
+          </a:p>
+          <a:p>
+            <a:pPr>
+              <a:spcAft>
+                <a:spcPts val="800"/>
+              </a:spcAft>
+              <a:defRPr sz="1200">
+                <a:solidFill>
+                  <a:srgbClr val="94A3B8"/>
+                </a:solidFill>
+                <a:latin typeface="Segoe UI"/>
+              </a:defRPr>
+            </a:pPr>
+            <a:r>
+              <a:t>  Integrate SMS gateways (Twilio / Fast2SMS) to automatically alert parents and students when overall attendance falls below the mandatory 75% threshold.</a:t>
+            </a:r>
+          </a:p>
+          <a:p>
+            <a:pPr>
+              <a:defRPr sz="1500" b="1">
+                <a:solidFill>
+                  <a:srgbClr val="FFFFFF"/>
+                </a:solidFill>
+                <a:latin typeface="Segoe UI"/>
+              </a:defRPr>
+            </a:pPr>
+            <a:r>
+              <a:t>★ Web Push Notifications (Planned)</a:t>
+            </a:r>
+          </a:p>
+          <a:p>
+            <a:pPr>
+              <a:spcAft>
+                <a:spcPts val="800"/>
+              </a:spcAft>
+              <a:defRPr sz="1200">
+                <a:solidFill>
+                  <a:srgbClr val="94A3B8"/>
+                </a:solidFill>
+                <a:latin typeface="Segoe UI"/>
+              </a:defRPr>
+            </a:pPr>
+            <a:r>
+              <a:t>  Implement Service Worker push notifications for urgent circulars, impending assignment deadlines, and newly published examination grade cards.</a:t>
+            </a:r>
+          </a:p>
+          <a:p>
+            <a:pPr>
+              <a:defRPr sz="1500" b="1">
+                <a:solidFill>
+                  <a:srgbClr val="FFFFFF"/>
+                </a:solidFill>
+                <a:latin typeface="Segoe UI"/>
+              </a:defRPr>
+            </a:pPr>
+            <a:r>
+              <a:t>★ Academic Analytics &amp; NIRF Reports (Planned)</a:t>
+            </a:r>
+          </a:p>
+          <a:p>
+            <a:pPr>
+              <a:spcAft>
+                <a:spcPts val="800"/>
+              </a:spcAft>
+              <a:defRPr sz="1200">
+                <a:solidFill>
+                  <a:srgbClr val="94A3B8"/>
+                </a:solidFill>
+                <a:latin typeface="Segoe UI"/>
+              </a:defRPr>
+            </a:pPr>
+            <a:r>
+              <a:t>  Build graphical department-wise analytics, batch pass-rate distributions, and automated CSV/PDF report generators for NIRF and NAAC accreditation reviews.</a:t>
+            </a:r>
+          </a:p>
+          <a:p>
+            <a:pPr>
+              <a:defRPr sz="1500" b="1">
+                <a:solidFill>
+                  <a:srgbClr val="FFFFFF"/>
+                </a:solidFill>
+                <a:latin typeface="Segoe UI"/>
+              </a:defRPr>
+            </a:pPr>
+            <a:r>
+              <a:t>★ Native Mobile Companion App (Planned)</a:t>
+            </a:r>
+          </a:p>
+          <a:p>
+            <a:pPr>
+              <a:spcAft>
+                <a:spcPts val="800"/>
+              </a:spcAft>
+              <a:defRPr sz="1200">
+                <a:solidFill>
+                  <a:srgbClr val="94A3B8"/>
+                </a:solidFill>
+                <a:latin typeface="Segoe UI"/>
+              </a:defRPr>
+            </a:pPr>
+            <a:r>
+              <a:t>  Develop a cross-platform mobile client (Flutter / React Native) leveraging the existing secure REST API endpoints for convenient student access on mobile devices.</a:t>
+            </a:r>
+          </a:p>
+        </p:txBody>
+      </p:sp>
+      <p:sp>
+        <p:nvSpPr>
+          <p:cNvPr id="9" name="Rectangle 8"/>
+          <p:cNvSpPr/>
+          <p:nvPr/>
+        </p:nvSpPr>
+        <p:spPr>
+          <a:xfrm>
+            <a:off x="731520" y="5532120"/>
+            <a:ext cx="10698480" cy="777240"/>
+          </a:xfrm>
+          <a:prstGeom prst="rect">
+            <a:avLst/>
+          </a:prstGeom>
+          <a:solidFill>
+            <a:srgbClr val="0B132B"/>
+          </a:solidFill>
+          <a:ln w="12700">
+            <a:solidFill>
+              <a:srgbClr val="0891B2"/>
+            </a:solidFill>
+          </a:ln>
+        </p:spPr>
+        <p:style>
+          <a:lnRef idx="1">
+            <a:schemeClr val="accent1"/>
+          </a:lnRef>
+          <a:fillRef idx="3">
+            <a:schemeClr val="accent1"/>
+          </a:fillRef>
+          <a:effectRef idx="2">
+            <a:schemeClr val="accent1"/>
+          </a:effectRef>
+          <a:fontRef idx="minor">
+            <a:schemeClr val="lt1"/>
+          </a:fontRef>
+        </p:style>
+        <p:txBody>
           <a:bodyPr rtlCol="0" anchor="ctr" wrap="square" lIns="228600" tIns="109728"/>
           <a:lstStyle/>
           <a:p>
@@ -7360,20 +7802,20 @@
               <a:spcAft>
                 <a:spcPts val="200"/>
               </a:spcAft>
-              <a:defRPr sz="950" b="1">
-                <a:solidFill>
-                  <a:srgbClr val="10B981"/>
-                </a:solidFill>
-                <a:latin typeface="Segoe UI"/>
-              </a:defRPr>
-            </a:pPr>
-            <a:r>
-              <a:t>PROJECT REPOSITORY &amp; CODEBASE:</a:t>
-            </a:r>
-          </a:p>
-          <a:p>
-            <a:pPr>
-              <a:defRPr sz="1100" b="1">
+              <a:defRPr sz="1400" b="1">
+                <a:solidFill>
+                  <a:srgbClr val="06B6D4"/>
+                </a:solidFill>
+                <a:latin typeface="Segoe UI"/>
+              </a:defRPr>
+            </a:pPr>
+            <a:r>
+              <a:t>CAMPUS CONNECT ERP • SITCOE YADRAV • THANK YOU!</a:t>
+            </a:r>
+          </a:p>
+          <a:p>
+            <a:pPr>
+              <a:defRPr sz="1200" b="1">
                 <a:solidFill>
                   <a:srgbClr val="FFFFFF"/>
                 </a:solidFill>
@@ -7381,7 +7823,7 @@
               </a:defRPr>
             </a:pPr>
             <a:r>
-              <a:t>GitHub Repository: https://github.com/ayanmulani4867-cyber/Campus-mini2  •  Branch: main  •  SITCOE Yadrav</a:t>
+              <a:t>Repository: https://github.com/ayanmulani4867-cyber/Campus-mini2  •  Open for Viva Questions &amp; Discussion</a:t>
             </a:r>
           </a:p>
         </p:txBody>
